--- a/cdwc_recommendation_system/presentation_ppt/CDWC_Redesign_Proposal.pptx
+++ b/cdwc_recommendation_system/presentation_ppt/CDWC_Redesign_Proposal.pptx
@@ -5,27 +5,27 @@
     <p:sldMasterId id="2147483648" r:id="rId1"/>
   </p:sldMasterIdLst>
   <p:sldIdLst>
-    <p:sldId id="256" r:id="rId2"/>
-    <p:sldId id="257" r:id="rId3"/>
-    <p:sldId id="258" r:id="rId4"/>
-    <p:sldId id="259" r:id="rId5"/>
-    <p:sldId id="260" r:id="rId6"/>
-    <p:sldId id="261" r:id="rId7"/>
-    <p:sldId id="262" r:id="rId8"/>
-    <p:sldId id="263" r:id="rId9"/>
-    <p:sldId id="264" r:id="rId10"/>
-    <p:sldId id="265" r:id="rId11"/>
-    <p:sldId id="266" r:id="rId12"/>
-    <p:sldId id="267" r:id="rId13"/>
-    <p:sldId id="268" r:id="rId14"/>
-    <p:sldId id="269" r:id="rId15"/>
-    <p:sldId id="270" r:id="rId16"/>
-    <p:sldId id="271" r:id="rId17"/>
-    <p:sldId id="272" r:id="rId18"/>
-    <p:sldId id="273" r:id="rId19"/>
-    <p:sldId id="274" r:id="rId20"/>
+    <p:sldId id="256" r:id="rId7"/>
+    <p:sldId id="257" r:id="rId8"/>
+    <p:sldId id="258" r:id="rId9"/>
+    <p:sldId id="259" r:id="rId10"/>
+    <p:sldId id="260" r:id="rId11"/>
+    <p:sldId id="261" r:id="rId12"/>
+    <p:sldId id="262" r:id="rId13"/>
+    <p:sldId id="263" r:id="rId14"/>
+    <p:sldId id="264" r:id="rId15"/>
+    <p:sldId id="265" r:id="rId16"/>
+    <p:sldId id="266" r:id="rId17"/>
+    <p:sldId id="267" r:id="rId18"/>
+    <p:sldId id="268" r:id="rId19"/>
+    <p:sldId id="269" r:id="rId20"/>
+    <p:sldId id="270" r:id="rId21"/>
+    <p:sldId id="271" r:id="rId22"/>
+    <p:sldId id="272" r:id="rId23"/>
+    <p:sldId id="273" r:id="rId24"/>
+    <p:sldId id="274" r:id="rId25"/>
   </p:sldIdLst>
-  <p:sldSz cx="12192000" cy="6858000"/>
+  <p:sldSz cx="12191695" cy="6858000" type="screen4x3"/>
   <p:notesSz cx="6858000" cy="9144000"/>
   <p:defaultTextStyle>
     <a:defPPr>
@@ -122,22 +122,6 @@
       </a:defRPr>
     </a:lvl9pPr>
   </p:defaultTextStyle>
-  <p:extLst>
-    <p:ext uri="{EFAFB233-063F-42B5-8137-9DF3F51BA10A}">
-      <p15:sldGuideLst xmlns:p15="http://schemas.microsoft.com/office/powerpoint/2012/main">
-        <p15:guide id="1" orient="horz" pos="2160">
-          <p15:clr>
-            <a:srgbClr val="A4A3A4"/>
-          </p15:clr>
-        </p15:guide>
-        <p15:guide id="2" pos="2880">
-          <p15:clr>
-            <a:srgbClr val="A4A3A4"/>
-          </p15:clr>
-        </p15:guide>
-      </p15:sldGuideLst>
-    </p:ext>
-  </p:extLst>
 </p:presentation>
 </file>
 
@@ -179,9 +163,10 @@
           <a:lstStyle/>
           <a:p>
             <a:r>
-              <a:rPr lang="en-US"/>
+              <a:rPr lang="en-US" smtClean="0"/>
               <a:t>Click to edit Master title style</a:t>
             </a:r>
+            <a:endParaRPr lang="en-US"/>
           </a:p>
         </p:txBody>
       </p:sp>
@@ -297,9 +282,10 @@
           </a:lstStyle>
           <a:p>
             <a:r>
-              <a:rPr lang="en-US"/>
+              <a:rPr lang="en-US" smtClean="0"/>
               <a:t>Click to edit Master subtitle style</a:t>
             </a:r>
+            <a:endParaRPr lang="en-US"/>
           </a:p>
         </p:txBody>
       </p:sp>
@@ -320,7 +306,7 @@
           <a:p>
             <a:fld id="{5BCAD085-E8A6-8845-BD4E-CB4CCA059FC4}" type="datetimeFigureOut">
               <a:rPr lang="en-US" smtClean="0"/>
-              <a:t>5/7/2026</a:t>
+              <a:t>1/27/13</a:t>
             </a:fld>
             <a:endParaRPr lang="en-US"/>
           </a:p>
@@ -414,9 +400,10 @@
           <a:lstStyle/>
           <a:p>
             <a:r>
-              <a:rPr lang="en-US"/>
+              <a:rPr lang="en-US" smtClean="0"/>
               <a:t>Click to edit Master title style</a:t>
             </a:r>
+            <a:endParaRPr lang="en-US"/>
           </a:p>
         </p:txBody>
       </p:sp>
@@ -437,37 +424,38 @@
           <a:p>
             <a:pPr lvl="0"/>
             <a:r>
-              <a:rPr lang="en-US"/>
+              <a:rPr lang="en-US" smtClean="0"/>
               <a:t>Click to edit Master text styles</a:t>
             </a:r>
           </a:p>
           <a:p>
             <a:pPr lvl="1"/>
             <a:r>
-              <a:rPr lang="en-US"/>
+              <a:rPr lang="en-US" smtClean="0"/>
               <a:t>Second level</a:t>
             </a:r>
           </a:p>
           <a:p>
             <a:pPr lvl="2"/>
             <a:r>
-              <a:rPr lang="en-US"/>
+              <a:rPr lang="en-US" smtClean="0"/>
               <a:t>Third level</a:t>
             </a:r>
           </a:p>
           <a:p>
             <a:pPr lvl="3"/>
             <a:r>
-              <a:rPr lang="en-US"/>
+              <a:rPr lang="en-US" smtClean="0"/>
               <a:t>Fourth level</a:t>
             </a:r>
           </a:p>
           <a:p>
             <a:pPr lvl="4"/>
             <a:r>
-              <a:rPr lang="en-US"/>
+              <a:rPr lang="en-US" smtClean="0"/>
               <a:t>Fifth level</a:t>
             </a:r>
+            <a:endParaRPr lang="en-US"/>
           </a:p>
         </p:txBody>
       </p:sp>
@@ -488,7 +476,7 @@
           <a:p>
             <a:fld id="{5BCAD085-E8A6-8845-BD4E-CB4CCA059FC4}" type="datetimeFigureOut">
               <a:rPr lang="en-US" smtClean="0"/>
-              <a:t>5/7/2026</a:t>
+              <a:t>1/27/13</a:t>
             </a:fld>
             <a:endParaRPr lang="en-US"/>
           </a:p>
@@ -587,9 +575,10 @@
           <a:lstStyle/>
           <a:p>
             <a:r>
-              <a:rPr lang="en-US"/>
+              <a:rPr lang="en-US" smtClean="0"/>
               <a:t>Click to edit Master title style</a:t>
             </a:r>
+            <a:endParaRPr lang="en-US"/>
           </a:p>
         </p:txBody>
       </p:sp>
@@ -615,37 +604,38 @@
           <a:p>
             <a:pPr lvl="0"/>
             <a:r>
-              <a:rPr lang="en-US"/>
+              <a:rPr lang="en-US" smtClean="0"/>
               <a:t>Click to edit Master text styles</a:t>
             </a:r>
           </a:p>
           <a:p>
             <a:pPr lvl="1"/>
             <a:r>
-              <a:rPr lang="en-US"/>
+              <a:rPr lang="en-US" smtClean="0"/>
               <a:t>Second level</a:t>
             </a:r>
           </a:p>
           <a:p>
             <a:pPr lvl="2"/>
             <a:r>
-              <a:rPr lang="en-US"/>
+              <a:rPr lang="en-US" smtClean="0"/>
               <a:t>Third level</a:t>
             </a:r>
           </a:p>
           <a:p>
             <a:pPr lvl="3"/>
             <a:r>
-              <a:rPr lang="en-US"/>
+              <a:rPr lang="en-US" smtClean="0"/>
               <a:t>Fourth level</a:t>
             </a:r>
           </a:p>
           <a:p>
             <a:pPr lvl="4"/>
             <a:r>
-              <a:rPr lang="en-US"/>
+              <a:rPr lang="en-US" smtClean="0"/>
               <a:t>Fifth level</a:t>
             </a:r>
+            <a:endParaRPr lang="en-US"/>
           </a:p>
         </p:txBody>
       </p:sp>
@@ -666,7 +656,7 @@
           <a:p>
             <a:fld id="{5BCAD085-E8A6-8845-BD4E-CB4CCA059FC4}" type="datetimeFigureOut">
               <a:rPr lang="en-US" smtClean="0"/>
-              <a:t>5/7/2026</a:t>
+              <a:t>1/27/13</a:t>
             </a:fld>
             <a:endParaRPr lang="en-US"/>
           </a:p>
@@ -760,9 +750,10 @@
           <a:lstStyle/>
           <a:p>
             <a:r>
-              <a:rPr lang="en-US"/>
+              <a:rPr lang="en-US" smtClean="0"/>
               <a:t>Click to edit Master title style</a:t>
             </a:r>
+            <a:endParaRPr lang="en-US"/>
           </a:p>
         </p:txBody>
       </p:sp>
@@ -783,37 +774,38 @@
           <a:p>
             <a:pPr lvl="0"/>
             <a:r>
-              <a:rPr lang="en-US"/>
+              <a:rPr lang="en-US" smtClean="0"/>
               <a:t>Click to edit Master text styles</a:t>
             </a:r>
           </a:p>
           <a:p>
             <a:pPr lvl="1"/>
             <a:r>
-              <a:rPr lang="en-US"/>
+              <a:rPr lang="en-US" smtClean="0"/>
               <a:t>Second level</a:t>
             </a:r>
           </a:p>
           <a:p>
             <a:pPr lvl="2"/>
             <a:r>
-              <a:rPr lang="en-US"/>
+              <a:rPr lang="en-US" smtClean="0"/>
               <a:t>Third level</a:t>
             </a:r>
           </a:p>
           <a:p>
             <a:pPr lvl="3"/>
             <a:r>
-              <a:rPr lang="en-US"/>
+              <a:rPr lang="en-US" smtClean="0"/>
               <a:t>Fourth level</a:t>
             </a:r>
           </a:p>
           <a:p>
             <a:pPr lvl="4"/>
             <a:r>
-              <a:rPr lang="en-US"/>
+              <a:rPr lang="en-US" smtClean="0"/>
               <a:t>Fifth level</a:t>
             </a:r>
+            <a:endParaRPr lang="en-US"/>
           </a:p>
         </p:txBody>
       </p:sp>
@@ -834,7 +826,7 @@
           <a:p>
             <a:fld id="{5BCAD085-E8A6-8845-BD4E-CB4CCA059FC4}" type="datetimeFigureOut">
               <a:rPr lang="en-US" smtClean="0"/>
-              <a:t>5/7/2026</a:t>
+              <a:t>1/27/13</a:t>
             </a:fld>
             <a:endParaRPr lang="en-US"/>
           </a:p>
@@ -937,9 +929,10 @@
           </a:lstStyle>
           <a:p>
             <a:r>
-              <a:rPr lang="en-US"/>
+              <a:rPr lang="en-US" smtClean="0"/>
               <a:t>Click to edit Master title style</a:t>
             </a:r>
+            <a:endParaRPr lang="en-US"/>
           </a:p>
         </p:txBody>
       </p:sp>
@@ -1056,7 +1049,7 @@
           <a:p>
             <a:pPr lvl="0"/>
             <a:r>
-              <a:rPr lang="en-US"/>
+              <a:rPr lang="en-US" smtClean="0"/>
               <a:t>Click to edit Master text styles</a:t>
             </a:r>
           </a:p>
@@ -1079,7 +1072,7 @@
           <a:p>
             <a:fld id="{5BCAD085-E8A6-8845-BD4E-CB4CCA059FC4}" type="datetimeFigureOut">
               <a:rPr lang="en-US" smtClean="0"/>
-              <a:t>5/7/2026</a:t>
+              <a:t>1/27/13</a:t>
             </a:fld>
             <a:endParaRPr lang="en-US"/>
           </a:p>
@@ -1173,9 +1166,10 @@
           <a:lstStyle/>
           <a:p>
             <a:r>
-              <a:rPr lang="en-US"/>
+              <a:rPr lang="en-US" smtClean="0"/>
               <a:t>Click to edit Master title style</a:t>
             </a:r>
+            <a:endParaRPr lang="en-US"/>
           </a:p>
         </p:txBody>
       </p:sp>
@@ -1229,37 +1223,38 @@
           <a:p>
             <a:pPr lvl="0"/>
             <a:r>
-              <a:rPr lang="en-US"/>
+              <a:rPr lang="en-US" smtClean="0"/>
               <a:t>Click to edit Master text styles</a:t>
             </a:r>
           </a:p>
           <a:p>
             <a:pPr lvl="1"/>
             <a:r>
-              <a:rPr lang="en-US"/>
+              <a:rPr lang="en-US" smtClean="0"/>
               <a:t>Second level</a:t>
             </a:r>
           </a:p>
           <a:p>
             <a:pPr lvl="2"/>
             <a:r>
-              <a:rPr lang="en-US"/>
+              <a:rPr lang="en-US" smtClean="0"/>
               <a:t>Third level</a:t>
             </a:r>
           </a:p>
           <a:p>
             <a:pPr lvl="3"/>
             <a:r>
-              <a:rPr lang="en-US"/>
+              <a:rPr lang="en-US" smtClean="0"/>
               <a:t>Fourth level</a:t>
             </a:r>
           </a:p>
           <a:p>
             <a:pPr lvl="4"/>
             <a:r>
-              <a:rPr lang="en-US"/>
+              <a:rPr lang="en-US" smtClean="0"/>
               <a:t>Fifth level</a:t>
             </a:r>
+            <a:endParaRPr lang="en-US"/>
           </a:p>
         </p:txBody>
       </p:sp>
@@ -1313,37 +1308,38 @@
           <a:p>
             <a:pPr lvl="0"/>
             <a:r>
-              <a:rPr lang="en-US"/>
+              <a:rPr lang="en-US" smtClean="0"/>
               <a:t>Click to edit Master text styles</a:t>
             </a:r>
           </a:p>
           <a:p>
             <a:pPr lvl="1"/>
             <a:r>
-              <a:rPr lang="en-US"/>
+              <a:rPr lang="en-US" smtClean="0"/>
               <a:t>Second level</a:t>
             </a:r>
           </a:p>
           <a:p>
             <a:pPr lvl="2"/>
             <a:r>
-              <a:rPr lang="en-US"/>
+              <a:rPr lang="en-US" smtClean="0"/>
               <a:t>Third level</a:t>
             </a:r>
           </a:p>
           <a:p>
             <a:pPr lvl="3"/>
             <a:r>
-              <a:rPr lang="en-US"/>
+              <a:rPr lang="en-US" smtClean="0"/>
               <a:t>Fourth level</a:t>
             </a:r>
           </a:p>
           <a:p>
             <a:pPr lvl="4"/>
             <a:r>
-              <a:rPr lang="en-US"/>
+              <a:rPr lang="en-US" smtClean="0"/>
               <a:t>Fifth level</a:t>
             </a:r>
+            <a:endParaRPr lang="en-US"/>
           </a:p>
         </p:txBody>
       </p:sp>
@@ -1364,7 +1360,7 @@
           <a:p>
             <a:fld id="{5BCAD085-E8A6-8845-BD4E-CB4CCA059FC4}" type="datetimeFigureOut">
               <a:rPr lang="en-US" smtClean="0"/>
-              <a:t>5/7/2026</a:t>
+              <a:t>1/27/13</a:t>
             </a:fld>
             <a:endParaRPr lang="en-US"/>
           </a:p>
@@ -1462,9 +1458,10 @@
           </a:lstStyle>
           <a:p>
             <a:r>
-              <a:rPr lang="en-US"/>
+              <a:rPr lang="en-US" smtClean="0"/>
               <a:t>Click to edit Master title style</a:t>
             </a:r>
+            <a:endParaRPr lang="en-US"/>
           </a:p>
         </p:txBody>
       </p:sp>
@@ -1527,7 +1524,7 @@
           <a:p>
             <a:pPr lvl="0"/>
             <a:r>
-              <a:rPr lang="en-US"/>
+              <a:rPr lang="en-US" smtClean="0"/>
               <a:t>Click to edit Master text styles</a:t>
             </a:r>
           </a:p>
@@ -1583,37 +1580,38 @@
           <a:p>
             <a:pPr lvl="0"/>
             <a:r>
-              <a:rPr lang="en-US"/>
+              <a:rPr lang="en-US" smtClean="0"/>
               <a:t>Click to edit Master text styles</a:t>
             </a:r>
           </a:p>
           <a:p>
             <a:pPr lvl="1"/>
             <a:r>
-              <a:rPr lang="en-US"/>
+              <a:rPr lang="en-US" smtClean="0"/>
               <a:t>Second level</a:t>
             </a:r>
           </a:p>
           <a:p>
             <a:pPr lvl="2"/>
             <a:r>
-              <a:rPr lang="en-US"/>
+              <a:rPr lang="en-US" smtClean="0"/>
               <a:t>Third level</a:t>
             </a:r>
           </a:p>
           <a:p>
             <a:pPr lvl="3"/>
             <a:r>
-              <a:rPr lang="en-US"/>
+              <a:rPr lang="en-US" smtClean="0"/>
               <a:t>Fourth level</a:t>
             </a:r>
           </a:p>
           <a:p>
             <a:pPr lvl="4"/>
             <a:r>
-              <a:rPr lang="en-US"/>
+              <a:rPr lang="en-US" smtClean="0"/>
               <a:t>Fifth level</a:t>
             </a:r>
+            <a:endParaRPr lang="en-US"/>
           </a:p>
         </p:txBody>
       </p:sp>
@@ -1676,7 +1674,7 @@
           <a:p>
             <a:pPr lvl="0"/>
             <a:r>
-              <a:rPr lang="en-US"/>
+              <a:rPr lang="en-US" smtClean="0"/>
               <a:t>Click to edit Master text styles</a:t>
             </a:r>
           </a:p>
@@ -1732,37 +1730,38 @@
           <a:p>
             <a:pPr lvl="0"/>
             <a:r>
-              <a:rPr lang="en-US"/>
+              <a:rPr lang="en-US" smtClean="0"/>
               <a:t>Click to edit Master text styles</a:t>
             </a:r>
           </a:p>
           <a:p>
             <a:pPr lvl="1"/>
             <a:r>
-              <a:rPr lang="en-US"/>
+              <a:rPr lang="en-US" smtClean="0"/>
               <a:t>Second level</a:t>
             </a:r>
           </a:p>
           <a:p>
             <a:pPr lvl="2"/>
             <a:r>
-              <a:rPr lang="en-US"/>
+              <a:rPr lang="en-US" smtClean="0"/>
               <a:t>Third level</a:t>
             </a:r>
           </a:p>
           <a:p>
             <a:pPr lvl="3"/>
             <a:r>
-              <a:rPr lang="en-US"/>
+              <a:rPr lang="en-US" smtClean="0"/>
               <a:t>Fourth level</a:t>
             </a:r>
           </a:p>
           <a:p>
             <a:pPr lvl="4"/>
             <a:r>
-              <a:rPr lang="en-US"/>
+              <a:rPr lang="en-US" smtClean="0"/>
               <a:t>Fifth level</a:t>
             </a:r>
+            <a:endParaRPr lang="en-US"/>
           </a:p>
         </p:txBody>
       </p:sp>
@@ -1783,7 +1782,7 @@
           <a:p>
             <a:fld id="{5BCAD085-E8A6-8845-BD4E-CB4CCA059FC4}" type="datetimeFigureOut">
               <a:rPr lang="en-US" smtClean="0"/>
-              <a:t>5/7/2026</a:t>
+              <a:t>1/27/13</a:t>
             </a:fld>
             <a:endParaRPr lang="en-US"/>
           </a:p>
@@ -1877,9 +1876,10 @@
           <a:lstStyle/>
           <a:p>
             <a:r>
-              <a:rPr lang="en-US"/>
+              <a:rPr lang="en-US" smtClean="0"/>
               <a:t>Click to edit Master title style</a:t>
             </a:r>
+            <a:endParaRPr lang="en-US"/>
           </a:p>
         </p:txBody>
       </p:sp>
@@ -1900,7 +1900,7 @@
           <a:p>
             <a:fld id="{5BCAD085-E8A6-8845-BD4E-CB4CCA059FC4}" type="datetimeFigureOut">
               <a:rPr lang="en-US" smtClean="0"/>
-              <a:t>5/7/2026</a:t>
+              <a:t>1/27/13</a:t>
             </a:fld>
             <a:endParaRPr lang="en-US"/>
           </a:p>
@@ -1995,7 +1995,7 @@
           <a:p>
             <a:fld id="{5BCAD085-E8A6-8845-BD4E-CB4CCA059FC4}" type="datetimeFigureOut">
               <a:rPr lang="en-US" smtClean="0"/>
-              <a:t>5/7/2026</a:t>
+              <a:t>1/27/13</a:t>
             </a:fld>
             <a:endParaRPr lang="en-US"/>
           </a:p>
@@ -2098,9 +2098,10 @@
           </a:lstStyle>
           <a:p>
             <a:r>
-              <a:rPr lang="en-US"/>
+              <a:rPr lang="en-US" smtClean="0"/>
               <a:t>Click to edit Master title style</a:t>
             </a:r>
+            <a:endParaRPr lang="en-US"/>
           </a:p>
         </p:txBody>
       </p:sp>
@@ -2154,37 +2155,38 @@
           <a:p>
             <a:pPr lvl="0"/>
             <a:r>
-              <a:rPr lang="en-US"/>
+              <a:rPr lang="en-US" smtClean="0"/>
               <a:t>Click to edit Master text styles</a:t>
             </a:r>
           </a:p>
           <a:p>
             <a:pPr lvl="1"/>
             <a:r>
-              <a:rPr lang="en-US"/>
+              <a:rPr lang="en-US" smtClean="0"/>
               <a:t>Second level</a:t>
             </a:r>
           </a:p>
           <a:p>
             <a:pPr lvl="2"/>
             <a:r>
-              <a:rPr lang="en-US"/>
+              <a:rPr lang="en-US" smtClean="0"/>
               <a:t>Third level</a:t>
             </a:r>
           </a:p>
           <a:p>
             <a:pPr lvl="3"/>
             <a:r>
-              <a:rPr lang="en-US"/>
+              <a:rPr lang="en-US" smtClean="0"/>
               <a:t>Fourth level</a:t>
             </a:r>
           </a:p>
           <a:p>
             <a:pPr lvl="4"/>
             <a:r>
-              <a:rPr lang="en-US"/>
+              <a:rPr lang="en-US" smtClean="0"/>
               <a:t>Fifth level</a:t>
             </a:r>
+            <a:endParaRPr lang="en-US"/>
           </a:p>
         </p:txBody>
       </p:sp>
@@ -2247,7 +2249,7 @@
           <a:p>
             <a:pPr lvl="0"/>
             <a:r>
-              <a:rPr lang="en-US"/>
+              <a:rPr lang="en-US" smtClean="0"/>
               <a:t>Click to edit Master text styles</a:t>
             </a:r>
           </a:p>
@@ -2270,7 +2272,7 @@
           <a:p>
             <a:fld id="{5BCAD085-E8A6-8845-BD4E-CB4CCA059FC4}" type="datetimeFigureOut">
               <a:rPr lang="en-US" smtClean="0"/>
-              <a:t>5/7/2026</a:t>
+              <a:t>1/27/13</a:t>
             </a:fld>
             <a:endParaRPr lang="en-US"/>
           </a:p>
@@ -2373,9 +2375,10 @@
           </a:lstStyle>
           <a:p>
             <a:r>
-              <a:rPr lang="en-US"/>
+              <a:rPr lang="en-US" smtClean="0"/>
               <a:t>Click to edit Master title style</a:t>
             </a:r>
+            <a:endParaRPr lang="en-US"/>
           </a:p>
         </p:txBody>
       </p:sp>
@@ -2499,7 +2502,7 @@
           <a:p>
             <a:pPr lvl="0"/>
             <a:r>
-              <a:rPr lang="en-US"/>
+              <a:rPr lang="en-US" smtClean="0"/>
               <a:t>Click to edit Master text styles</a:t>
             </a:r>
           </a:p>
@@ -2522,7 +2525,7 @@
           <a:p>
             <a:fld id="{5BCAD085-E8A6-8845-BD4E-CB4CCA059FC4}" type="datetimeFigureOut">
               <a:rPr lang="en-US" smtClean="0"/>
-              <a:t>5/7/2026</a:t>
+              <a:t>1/27/13</a:t>
             </a:fld>
             <a:endParaRPr lang="en-US"/>
           </a:p>
@@ -2631,9 +2634,10 @@
           <a:lstStyle/>
           <a:p>
             <a:r>
-              <a:rPr lang="en-US"/>
+              <a:rPr lang="en-US" smtClean="0"/>
               <a:t>Click to edit Master title style</a:t>
             </a:r>
+            <a:endParaRPr lang="en-US"/>
           </a:p>
         </p:txBody>
       </p:sp>
@@ -2664,37 +2668,38 @@
           <a:p>
             <a:pPr lvl="0"/>
             <a:r>
-              <a:rPr lang="en-US"/>
+              <a:rPr lang="en-US" smtClean="0"/>
               <a:t>Click to edit Master text styles</a:t>
             </a:r>
           </a:p>
           <a:p>
             <a:pPr lvl="1"/>
             <a:r>
-              <a:rPr lang="en-US"/>
+              <a:rPr lang="en-US" smtClean="0"/>
               <a:t>Second level</a:t>
             </a:r>
           </a:p>
           <a:p>
             <a:pPr lvl="2"/>
             <a:r>
-              <a:rPr lang="en-US"/>
+              <a:rPr lang="en-US" smtClean="0"/>
               <a:t>Third level</a:t>
             </a:r>
           </a:p>
           <a:p>
             <a:pPr lvl="3"/>
             <a:r>
-              <a:rPr lang="en-US"/>
+              <a:rPr lang="en-US" smtClean="0"/>
               <a:t>Fourth level</a:t>
             </a:r>
           </a:p>
           <a:p>
             <a:pPr lvl="4"/>
             <a:r>
-              <a:rPr lang="en-US"/>
+              <a:rPr lang="en-US" smtClean="0"/>
               <a:t>Fifth level</a:t>
             </a:r>
+            <a:endParaRPr lang="en-US"/>
           </a:p>
         </p:txBody>
       </p:sp>
@@ -2733,7 +2738,7 @@
           <a:p>
             <a:fld id="{5BCAD085-E8A6-8845-BD4E-CB4CCA059FC4}" type="datetimeFigureOut">
               <a:rPr lang="en-US" smtClean="0"/>
-              <a:t>5/7/2026</a:t>
+              <a:t>1/27/13</a:t>
             </a:fld>
             <a:endParaRPr lang="en-US"/>
           </a:p>
@@ -3092,7 +3097,7 @@
 </file>
 
 <file path=ppt/slides/slide1.xml><?xml version="1.0" encoding="utf-8"?>
-<p:sld xmlns:a="http://schemas.openxmlformats.org/drawingml/2006/main" xmlns:r="http://schemas.openxmlformats.org/officeDocument/2006/relationships" xmlns:p="http://schemas.openxmlformats.org/presentationml/2006/main">
+<p:sld xmlns:a="http://schemas.openxmlformats.org/drawingml/2006/main" xmlns:p="http://schemas.openxmlformats.org/presentationml/2006/main" xmlns:r="http://schemas.openxmlformats.org/officeDocument/2006/relationships">
   <p:cSld>
     <p:bg>
       <p:bgPr>
@@ -3108,14 +3113,7 @@
         <p:cNvGrpSpPr/>
         <p:nvPr/>
       </p:nvGrpSpPr>
-      <p:grpSpPr>
-        <a:xfrm>
-          <a:off x="0" y="0"/>
-          <a:ext cx="0" cy="0"/>
-          <a:chOff x="0" y="0"/>
-          <a:chExt cx="0" cy="0"/>
-        </a:xfrm>
-      </p:grpSpPr>
+      <p:grpSpPr/>
       <p:sp>
         <p:nvSpPr>
           <p:cNvPr id="2" name="TextBox 1"/>
@@ -3147,7 +3145,7 @@
               </a:defRPr>
             </a:pPr>
             <a:r>
-              <a:t>CDWC Talent Diagnostic Engine</a:t>
+              <a:t>CDWC Diagnostic Engine</a:t>
             </a:r>
           </a:p>
         </p:txBody>
@@ -3269,7 +3267,7 @@
 </file>
 
 <file path=ppt/slides/slide10.xml><?xml version="1.0" encoding="utf-8"?>
-<p:sld xmlns:a="http://schemas.openxmlformats.org/drawingml/2006/main" xmlns:r="http://schemas.openxmlformats.org/officeDocument/2006/relationships" xmlns:p="http://schemas.openxmlformats.org/presentationml/2006/main">
+<p:sld xmlns:a="http://schemas.openxmlformats.org/drawingml/2006/main" xmlns:p="http://schemas.openxmlformats.org/presentationml/2006/main" xmlns:r="http://schemas.openxmlformats.org/officeDocument/2006/relationships">
   <p:cSld>
     <p:bg>
       <p:bgPr>
@@ -3285,14 +3283,7 @@
         <p:cNvGrpSpPr/>
         <p:nvPr/>
       </p:nvGrpSpPr>
-      <p:grpSpPr>
-        <a:xfrm>
-          <a:off x="0" y="0"/>
-          <a:ext cx="0" cy="0"/>
-          <a:chOff x="0" y="0"/>
-          <a:chExt cx="0" cy="0"/>
-        </a:xfrm>
-      </p:grpSpPr>
+      <p:grpSpPr/>
       <p:sp>
         <p:nvSpPr>
           <p:cNvPr id="2" name="TextBox 1"/>
@@ -3369,7 +3360,6 @@
           <a:lstStyle/>
           <a:p>
             <a:pPr algn="ctr"/>
-            <a:endParaRPr/>
           </a:p>
         </p:txBody>
       </p:sp>
@@ -3415,7 +3405,6 @@
           <a:lstStyle/>
           <a:p>
             <a:pPr algn="ctr"/>
-            <a:endParaRPr/>
           </a:p>
         </p:txBody>
       </p:sp>
@@ -3685,7 +3674,6 @@
           <a:lstStyle/>
           <a:p>
             <a:pPr algn="ctr"/>
-            <a:endParaRPr/>
           </a:p>
         </p:txBody>
       </p:sp>
@@ -3910,7 +3898,7 @@
 </file>
 
 <file path=ppt/slides/slide11.xml><?xml version="1.0" encoding="utf-8"?>
-<p:sld xmlns:a="http://schemas.openxmlformats.org/drawingml/2006/main" xmlns:r="http://schemas.openxmlformats.org/officeDocument/2006/relationships" xmlns:p="http://schemas.openxmlformats.org/presentationml/2006/main">
+<p:sld xmlns:a="http://schemas.openxmlformats.org/drawingml/2006/main" xmlns:p="http://schemas.openxmlformats.org/presentationml/2006/main" xmlns:r="http://schemas.openxmlformats.org/officeDocument/2006/relationships">
   <p:cSld>
     <p:bg>
       <p:bgPr>
@@ -3926,14 +3914,7 @@
         <p:cNvGrpSpPr/>
         <p:nvPr/>
       </p:nvGrpSpPr>
-      <p:grpSpPr>
-        <a:xfrm>
-          <a:off x="0" y="0"/>
-          <a:ext cx="0" cy="0"/>
-          <a:chOff x="0" y="0"/>
-          <a:chExt cx="0" cy="0"/>
-        </a:xfrm>
-      </p:grpSpPr>
+      <p:grpSpPr/>
       <p:sp>
         <p:nvSpPr>
           <p:cNvPr id="2" name="TextBox 1"/>
@@ -4046,7 +4027,6 @@
           <a:lstStyle/>
           <a:p>
             <a:pPr algn="ctr"/>
-            <a:endParaRPr/>
           </a:p>
         </p:txBody>
       </p:sp>
@@ -4336,7 +4316,7 @@
           </a:fontRef>
         </p:style>
         <p:txBody>
-          <a:bodyPr wrap="square" rtlCol="0" anchor="ctr"/>
+          <a:bodyPr rtlCol="0" anchor="ctr" wrap="square"/>
           <a:lstStyle/>
           <a:p>
             <a:pPr algn="l">
@@ -4391,7 +4371,7 @@
           </a:fontRef>
         </p:style>
         <p:txBody>
-          <a:bodyPr wrap="square" rtlCol="0" anchor="ctr"/>
+          <a:bodyPr rtlCol="0" anchor="ctr" wrap="square"/>
           <a:lstStyle/>
           <a:p>
             <a:pPr algn="l">
@@ -4446,7 +4426,7 @@
           </a:fontRef>
         </p:style>
         <p:txBody>
-          <a:bodyPr wrap="square" rtlCol="0" anchor="ctr"/>
+          <a:bodyPr rtlCol="0" anchor="ctr" wrap="square"/>
           <a:lstStyle/>
           <a:p>
             <a:pPr algn="l">
@@ -4501,7 +4481,7 @@
           </a:fontRef>
         </p:style>
         <p:txBody>
-          <a:bodyPr wrap="square" rtlCol="0" anchor="ctr"/>
+          <a:bodyPr rtlCol="0" anchor="ctr" wrap="square"/>
           <a:lstStyle/>
           <a:p>
             <a:pPr algn="l">
@@ -4556,7 +4536,7 @@
           </a:fontRef>
         </p:style>
         <p:txBody>
-          <a:bodyPr wrap="square" rtlCol="0" anchor="ctr"/>
+          <a:bodyPr rtlCol="0" anchor="ctr" wrap="square"/>
           <a:lstStyle/>
           <a:p>
             <a:pPr algn="l">
@@ -4611,7 +4591,7 @@
           </a:fontRef>
         </p:style>
         <p:txBody>
-          <a:bodyPr wrap="square" rtlCol="0" anchor="ctr"/>
+          <a:bodyPr rtlCol="0" anchor="ctr" wrap="square"/>
           <a:lstStyle/>
           <a:p>
             <a:pPr algn="l">
@@ -4666,7 +4646,7 @@
           </a:fontRef>
         </p:style>
         <p:txBody>
-          <a:bodyPr wrap="square" rtlCol="0" anchor="ctr"/>
+          <a:bodyPr rtlCol="0" anchor="ctr" wrap="square"/>
           <a:lstStyle/>
           <a:p>
             <a:pPr algn="l">
@@ -4721,7 +4701,7 @@
           </a:fontRef>
         </p:style>
         <p:txBody>
-          <a:bodyPr wrap="square" rtlCol="0" anchor="ctr"/>
+          <a:bodyPr rtlCol="0" anchor="ctr" wrap="square"/>
           <a:lstStyle/>
           <a:p>
             <a:pPr algn="l">
@@ -4776,7 +4756,7 @@
           </a:fontRef>
         </p:style>
         <p:txBody>
-          <a:bodyPr wrap="square" rtlCol="0" anchor="ctr"/>
+          <a:bodyPr rtlCol="0" anchor="ctr" wrap="square"/>
           <a:lstStyle/>
           <a:p>
             <a:pPr algn="l">
@@ -4831,7 +4811,7 @@
           </a:fontRef>
         </p:style>
         <p:txBody>
-          <a:bodyPr wrap="square" rtlCol="0" anchor="ctr"/>
+          <a:bodyPr rtlCol="0" anchor="ctr" wrap="square"/>
           <a:lstStyle/>
           <a:p>
             <a:pPr algn="l">
@@ -4886,7 +4866,7 @@
           </a:fontRef>
         </p:style>
         <p:txBody>
-          <a:bodyPr wrap="square" rtlCol="0" anchor="ctr"/>
+          <a:bodyPr rtlCol="0" anchor="ctr" wrap="square"/>
           <a:lstStyle/>
           <a:p>
             <a:pPr algn="l">
@@ -4941,7 +4921,7 @@
           </a:fontRef>
         </p:style>
         <p:txBody>
-          <a:bodyPr wrap="square" rtlCol="0" anchor="ctr"/>
+          <a:bodyPr rtlCol="0" anchor="ctr" wrap="square"/>
           <a:lstStyle/>
           <a:p>
             <a:pPr algn="l">
@@ -5000,7 +4980,6 @@
           <a:lstStyle/>
           <a:p>
             <a:pPr algn="ctr"/>
-            <a:endParaRPr/>
           </a:p>
         </p:txBody>
       </p:sp>
@@ -5085,7 +5064,7 @@
 </file>
 
 <file path=ppt/slides/slide12.xml><?xml version="1.0" encoding="utf-8"?>
-<p:sld xmlns:a="http://schemas.openxmlformats.org/drawingml/2006/main" xmlns:r="http://schemas.openxmlformats.org/officeDocument/2006/relationships" xmlns:p="http://schemas.openxmlformats.org/presentationml/2006/main">
+<p:sld xmlns:a="http://schemas.openxmlformats.org/drawingml/2006/main" xmlns:p="http://schemas.openxmlformats.org/presentationml/2006/main" xmlns:r="http://schemas.openxmlformats.org/officeDocument/2006/relationships">
   <p:cSld>
     <p:bg>
       <p:bgPr>
@@ -5101,14 +5080,7 @@
         <p:cNvGrpSpPr/>
         <p:nvPr/>
       </p:nvGrpSpPr>
-      <p:grpSpPr>
-        <a:xfrm>
-          <a:off x="0" y="0"/>
-          <a:ext cx="0" cy="0"/>
-          <a:chOff x="0" y="0"/>
-          <a:chExt cx="0" cy="0"/>
-        </a:xfrm>
-      </p:grpSpPr>
+      <p:grpSpPr/>
       <p:sp>
         <p:nvSpPr>
           <p:cNvPr id="2" name="TextBox 1"/>
@@ -5221,7 +5193,6 @@
           <a:lstStyle/>
           <a:p>
             <a:pPr algn="ctr"/>
-            <a:endParaRPr/>
           </a:p>
         </p:txBody>
       </p:sp>
@@ -5267,7 +5238,6 @@
           <a:lstStyle/>
           <a:p>
             <a:pPr algn="ctr"/>
-            <a:endParaRPr/>
           </a:p>
         </p:txBody>
       </p:sp>
@@ -5404,7 +5374,6 @@
                 <a:latin typeface="Calibri"/>
               </a:defRPr>
             </a:pPr>
-            <a:endParaRPr/>
           </a:p>
           <a:p>
             <a:pPr>
@@ -5498,7 +5467,6 @@
           <a:lstStyle/>
           <a:p>
             <a:pPr algn="ctr"/>
-            <a:endParaRPr/>
           </a:p>
         </p:txBody>
       </p:sp>
@@ -5635,7 +5603,6 @@
                 <a:latin typeface="Calibri"/>
               </a:defRPr>
             </a:pPr>
-            <a:endParaRPr/>
           </a:p>
           <a:p>
             <a:pPr>
@@ -5729,7 +5696,6 @@
           <a:lstStyle/>
           <a:p>
             <a:pPr algn="ctr"/>
-            <a:endParaRPr/>
           </a:p>
         </p:txBody>
       </p:sp>
@@ -5898,7 +5864,6 @@
                 <a:latin typeface="Calibri"/>
               </a:defRPr>
             </a:pPr>
-            <a:endParaRPr/>
           </a:p>
           <a:p>
             <a:pPr>
@@ -5959,7 +5924,7 @@
 </file>
 
 <file path=ppt/slides/slide13.xml><?xml version="1.0" encoding="utf-8"?>
-<p:sld xmlns:a="http://schemas.openxmlformats.org/drawingml/2006/main" xmlns:r="http://schemas.openxmlformats.org/officeDocument/2006/relationships" xmlns:p="http://schemas.openxmlformats.org/presentationml/2006/main">
+<p:sld xmlns:a="http://schemas.openxmlformats.org/drawingml/2006/main" xmlns:p="http://schemas.openxmlformats.org/presentationml/2006/main" xmlns:r="http://schemas.openxmlformats.org/officeDocument/2006/relationships">
   <p:cSld>
     <p:bg>
       <p:bgPr>
@@ -5975,14 +5940,7 @@
         <p:cNvGrpSpPr/>
         <p:nvPr/>
       </p:nvGrpSpPr>
-      <p:grpSpPr>
-        <a:xfrm>
-          <a:off x="0" y="0"/>
-          <a:ext cx="0" cy="0"/>
-          <a:chOff x="0" y="0"/>
-          <a:chExt cx="0" cy="0"/>
-        </a:xfrm>
-      </p:grpSpPr>
+      <p:grpSpPr/>
       <p:sp>
         <p:nvSpPr>
           <p:cNvPr id="2" name="TextBox 1"/>
@@ -6095,7 +6053,6 @@
           <a:lstStyle/>
           <a:p>
             <a:pPr algn="ctr"/>
-            <a:endParaRPr/>
           </a:p>
         </p:txBody>
       </p:sp>
@@ -6141,7 +6098,6 @@
           <a:lstStyle/>
           <a:p>
             <a:pPr algn="ctr"/>
-            <a:endParaRPr/>
           </a:p>
         </p:txBody>
       </p:sp>
@@ -6230,7 +6186,6 @@
                 <a:latin typeface="Calibri"/>
               </a:defRPr>
             </a:pPr>
-            <a:endParaRPr/>
           </a:p>
           <a:p>
             <a:pPr>
@@ -6276,7 +6231,6 @@
                 <a:latin typeface="Calibri"/>
               </a:defRPr>
             </a:pPr>
-            <a:endParaRPr/>
           </a:p>
           <a:p>
             <a:pPr>
@@ -6322,7 +6276,6 @@
                 <a:latin typeface="Calibri"/>
               </a:defRPr>
             </a:pPr>
-            <a:endParaRPr/>
           </a:p>
           <a:p>
             <a:pPr>
@@ -6368,7 +6321,6 @@
                 <a:latin typeface="Calibri"/>
               </a:defRPr>
             </a:pPr>
-            <a:endParaRPr/>
           </a:p>
           <a:p>
             <a:pPr>
@@ -6446,7 +6398,6 @@
           <a:lstStyle/>
           <a:p>
             <a:pPr algn="ctr"/>
-            <a:endParaRPr/>
           </a:p>
         </p:txBody>
       </p:sp>
@@ -6535,7 +6486,6 @@
                 <a:latin typeface="Calibri"/>
               </a:defRPr>
             </a:pPr>
-            <a:endParaRPr/>
           </a:p>
           <a:p>
             <a:pPr>
@@ -6613,7 +6563,6 @@
                 <a:latin typeface="Calibri"/>
               </a:defRPr>
             </a:pPr>
-            <a:endParaRPr/>
           </a:p>
           <a:p>
             <a:pPr>
@@ -6659,7 +6608,6 @@
                 <a:latin typeface="Calibri"/>
               </a:defRPr>
             </a:pPr>
-            <a:endParaRPr/>
           </a:p>
           <a:p>
             <a:pPr>
@@ -6704,7 +6652,7 @@
 </file>
 
 <file path=ppt/slides/slide14.xml><?xml version="1.0" encoding="utf-8"?>
-<p:sld xmlns:a="http://schemas.openxmlformats.org/drawingml/2006/main" xmlns:r="http://schemas.openxmlformats.org/officeDocument/2006/relationships" xmlns:p="http://schemas.openxmlformats.org/presentationml/2006/main">
+<p:sld xmlns:a="http://schemas.openxmlformats.org/drawingml/2006/main" xmlns:p="http://schemas.openxmlformats.org/presentationml/2006/main" xmlns:r="http://schemas.openxmlformats.org/officeDocument/2006/relationships">
   <p:cSld>
     <p:bg>
       <p:bgPr>
@@ -6720,14 +6668,7 @@
         <p:cNvGrpSpPr/>
         <p:nvPr/>
       </p:nvGrpSpPr>
-      <p:grpSpPr>
-        <a:xfrm>
-          <a:off x="0" y="0"/>
-          <a:ext cx="0" cy="0"/>
-          <a:chOff x="0" y="0"/>
-          <a:chExt cx="0" cy="0"/>
-        </a:xfrm>
-      </p:grpSpPr>
+      <p:grpSpPr/>
       <p:sp>
         <p:nvSpPr>
           <p:cNvPr id="2" name="TextBox 1"/>
@@ -6804,7 +6745,6 @@
           <a:lstStyle/>
           <a:p>
             <a:pPr algn="ctr"/>
-            <a:endParaRPr/>
           </a:p>
         </p:txBody>
       </p:sp>
@@ -6952,7 +6892,7 @@
           </a:fontRef>
         </p:style>
         <p:txBody>
-          <a:bodyPr wrap="square" rtlCol="0" anchor="ctr"/>
+          <a:bodyPr rtlCol="0" anchor="ctr" wrap="square"/>
           <a:lstStyle/>
           <a:p>
             <a:pPr algn="l">
@@ -7007,7 +6947,7 @@
           </a:fontRef>
         </p:style>
         <p:txBody>
-          <a:bodyPr wrap="square" rtlCol="0" anchor="ctr"/>
+          <a:bodyPr rtlCol="0" anchor="ctr" wrap="square"/>
           <a:lstStyle/>
           <a:p>
             <a:pPr algn="l">
@@ -7062,7 +7002,7 @@
           </a:fontRef>
         </p:style>
         <p:txBody>
-          <a:bodyPr wrap="square" rtlCol="0" anchor="ctr"/>
+          <a:bodyPr rtlCol="0" anchor="ctr" wrap="square"/>
           <a:lstStyle/>
           <a:p>
             <a:pPr algn="l">
@@ -7117,7 +7057,7 @@
           </a:fontRef>
         </p:style>
         <p:txBody>
-          <a:bodyPr wrap="square" rtlCol="0" anchor="ctr"/>
+          <a:bodyPr rtlCol="0" anchor="ctr" wrap="square"/>
           <a:lstStyle/>
           <a:p>
             <a:pPr algn="l">
@@ -7172,7 +7112,7 @@
           </a:fontRef>
         </p:style>
         <p:txBody>
-          <a:bodyPr wrap="square" rtlCol="0" anchor="ctr"/>
+          <a:bodyPr rtlCol="0" anchor="ctr" wrap="square"/>
           <a:lstStyle/>
           <a:p>
             <a:pPr algn="l">
@@ -7227,7 +7167,7 @@
           </a:fontRef>
         </p:style>
         <p:txBody>
-          <a:bodyPr wrap="square" rtlCol="0" anchor="ctr"/>
+          <a:bodyPr rtlCol="0" anchor="ctr" wrap="square"/>
           <a:lstStyle/>
           <a:p>
             <a:pPr algn="l">
@@ -7282,7 +7222,7 @@
           </a:fontRef>
         </p:style>
         <p:txBody>
-          <a:bodyPr wrap="square" rtlCol="0" anchor="ctr"/>
+          <a:bodyPr rtlCol="0" anchor="ctr" wrap="square"/>
           <a:lstStyle/>
           <a:p>
             <a:pPr algn="l">
@@ -7337,7 +7277,7 @@
           </a:fontRef>
         </p:style>
         <p:txBody>
-          <a:bodyPr wrap="square" rtlCol="0" anchor="ctr"/>
+          <a:bodyPr rtlCol="0" anchor="ctr" wrap="square"/>
           <a:lstStyle/>
           <a:p>
             <a:pPr algn="l">
@@ -7392,7 +7332,7 @@
           </a:fontRef>
         </p:style>
         <p:txBody>
-          <a:bodyPr wrap="square" rtlCol="0" anchor="ctr"/>
+          <a:bodyPr rtlCol="0" anchor="ctr" wrap="square"/>
           <a:lstStyle/>
           <a:p>
             <a:pPr algn="l">
@@ -7447,7 +7387,7 @@
           </a:fontRef>
         </p:style>
         <p:txBody>
-          <a:bodyPr wrap="square" rtlCol="0" anchor="ctr"/>
+          <a:bodyPr rtlCol="0" anchor="ctr" wrap="square"/>
           <a:lstStyle/>
           <a:p>
             <a:pPr algn="l">
@@ -7502,7 +7442,7 @@
           </a:fontRef>
         </p:style>
         <p:txBody>
-          <a:bodyPr wrap="square" rtlCol="0" anchor="ctr"/>
+          <a:bodyPr rtlCol="0" anchor="ctr" wrap="square"/>
           <a:lstStyle/>
           <a:p>
             <a:pPr algn="l">
@@ -7557,7 +7497,7 @@
           </a:fontRef>
         </p:style>
         <p:txBody>
-          <a:bodyPr wrap="square" rtlCol="0" anchor="ctr"/>
+          <a:bodyPr rtlCol="0" anchor="ctr" wrap="square"/>
           <a:lstStyle/>
           <a:p>
             <a:pPr algn="l">
@@ -7612,7 +7552,7 @@
           </a:fontRef>
         </p:style>
         <p:txBody>
-          <a:bodyPr wrap="square" rtlCol="0" anchor="ctr"/>
+          <a:bodyPr rtlCol="0" anchor="ctr" wrap="square"/>
           <a:lstStyle/>
           <a:p>
             <a:pPr algn="l">
@@ -7667,7 +7607,7 @@
           </a:fontRef>
         </p:style>
         <p:txBody>
-          <a:bodyPr wrap="square" rtlCol="0" anchor="ctr"/>
+          <a:bodyPr rtlCol="0" anchor="ctr" wrap="square"/>
           <a:lstStyle/>
           <a:p>
             <a:pPr algn="l">
@@ -7693,7 +7633,7 @@
 </file>
 
 <file path=ppt/slides/slide15.xml><?xml version="1.0" encoding="utf-8"?>
-<p:sld xmlns:a="http://schemas.openxmlformats.org/drawingml/2006/main" xmlns:r="http://schemas.openxmlformats.org/officeDocument/2006/relationships" xmlns:p="http://schemas.openxmlformats.org/presentationml/2006/main">
+<p:sld xmlns:a="http://schemas.openxmlformats.org/drawingml/2006/main" xmlns:p="http://schemas.openxmlformats.org/presentationml/2006/main" xmlns:r="http://schemas.openxmlformats.org/officeDocument/2006/relationships">
   <p:cSld>
     <p:bg>
       <p:bgPr>
@@ -7709,14 +7649,7 @@
         <p:cNvGrpSpPr/>
         <p:nvPr/>
       </p:nvGrpSpPr>
-      <p:grpSpPr>
-        <a:xfrm>
-          <a:off x="0" y="0"/>
-          <a:ext cx="0" cy="0"/>
-          <a:chOff x="0" y="0"/>
-          <a:chExt cx="0" cy="0"/>
-        </a:xfrm>
-      </p:grpSpPr>
+      <p:grpSpPr/>
       <p:sp>
         <p:nvSpPr>
           <p:cNvPr id="2" name="TextBox 1"/>
@@ -7793,7 +7726,6 @@
           <a:lstStyle/>
           <a:p>
             <a:pPr algn="ctr"/>
-            <a:endParaRPr/>
           </a:p>
         </p:txBody>
       </p:sp>
@@ -7839,7 +7771,6 @@
           <a:lstStyle/>
           <a:p>
             <a:pPr algn="ctr"/>
-            <a:endParaRPr/>
           </a:p>
         </p:txBody>
       </p:sp>
@@ -7989,7 +7920,6 @@
           <a:lstStyle/>
           <a:p>
             <a:pPr algn="ctr"/>
-            <a:endParaRPr/>
           </a:p>
         </p:txBody>
       </p:sp>
@@ -8205,7 +8135,7 @@
 </file>
 
 <file path=ppt/slides/slide16.xml><?xml version="1.0" encoding="utf-8"?>
-<p:sld xmlns:a="http://schemas.openxmlformats.org/drawingml/2006/main" xmlns:r="http://schemas.openxmlformats.org/officeDocument/2006/relationships" xmlns:p="http://schemas.openxmlformats.org/presentationml/2006/main">
+<p:sld xmlns:a="http://schemas.openxmlformats.org/drawingml/2006/main" xmlns:p="http://schemas.openxmlformats.org/presentationml/2006/main" xmlns:r="http://schemas.openxmlformats.org/officeDocument/2006/relationships">
   <p:cSld>
     <p:bg>
       <p:bgPr>
@@ -8221,14 +8151,7 @@
         <p:cNvGrpSpPr/>
         <p:nvPr/>
       </p:nvGrpSpPr>
-      <p:grpSpPr>
-        <a:xfrm>
-          <a:off x="0" y="0"/>
-          <a:ext cx="0" cy="0"/>
-          <a:chOff x="0" y="0"/>
-          <a:chExt cx="0" cy="0"/>
-        </a:xfrm>
-      </p:grpSpPr>
+      <p:grpSpPr/>
       <p:sp>
         <p:nvSpPr>
           <p:cNvPr id="2" name="TextBox 1"/>
@@ -8305,7 +8228,6 @@
           <a:lstStyle/>
           <a:p>
             <a:pPr algn="ctr"/>
-            <a:endParaRPr/>
           </a:p>
         </p:txBody>
       </p:sp>
@@ -8506,7 +8428,7 @@
           </a:fontRef>
         </p:style>
         <p:txBody>
-          <a:bodyPr wrap="square" rtlCol="0" anchor="ctr"/>
+          <a:bodyPr rtlCol="0" anchor="ctr" wrap="square"/>
           <a:lstStyle/>
           <a:p>
             <a:pPr algn="l">
@@ -8561,7 +8483,7 @@
           </a:fontRef>
         </p:style>
         <p:txBody>
-          <a:bodyPr wrap="square" rtlCol="0" anchor="ctr"/>
+          <a:bodyPr rtlCol="0" anchor="ctr" wrap="square"/>
           <a:lstStyle/>
           <a:p>
             <a:pPr algn="l">
@@ -8616,7 +8538,7 @@
           </a:fontRef>
         </p:style>
         <p:txBody>
-          <a:bodyPr wrap="square" rtlCol="0" anchor="ctr"/>
+          <a:bodyPr rtlCol="0" anchor="ctr" wrap="square"/>
           <a:lstStyle/>
           <a:p>
             <a:pPr algn="l">
@@ -8671,7 +8593,7 @@
           </a:fontRef>
         </p:style>
         <p:txBody>
-          <a:bodyPr wrap="square" rtlCol="0" anchor="ctr"/>
+          <a:bodyPr rtlCol="0" anchor="ctr" wrap="square"/>
           <a:lstStyle/>
           <a:p>
             <a:pPr algn="l">
@@ -8726,7 +8648,7 @@
           </a:fontRef>
         </p:style>
         <p:txBody>
-          <a:bodyPr wrap="square" rtlCol="0" anchor="ctr"/>
+          <a:bodyPr rtlCol="0" anchor="ctr" wrap="square"/>
           <a:lstStyle/>
           <a:p>
             <a:pPr algn="l">
@@ -8781,7 +8703,7 @@
           </a:fontRef>
         </p:style>
         <p:txBody>
-          <a:bodyPr wrap="square" rtlCol="0" anchor="ctr"/>
+          <a:bodyPr rtlCol="0" anchor="ctr" wrap="square"/>
           <a:lstStyle/>
           <a:p>
             <a:pPr algn="l">
@@ -8836,7 +8758,7 @@
           </a:fontRef>
         </p:style>
         <p:txBody>
-          <a:bodyPr wrap="square" rtlCol="0" anchor="ctr"/>
+          <a:bodyPr rtlCol="0" anchor="ctr" wrap="square"/>
           <a:lstStyle/>
           <a:p>
             <a:pPr algn="l">
@@ -8891,7 +8813,7 @@
           </a:fontRef>
         </p:style>
         <p:txBody>
-          <a:bodyPr wrap="square" rtlCol="0" anchor="ctr"/>
+          <a:bodyPr rtlCol="0" anchor="ctr" wrap="square"/>
           <a:lstStyle/>
           <a:p>
             <a:pPr algn="l">
@@ -8946,7 +8868,7 @@
           </a:fontRef>
         </p:style>
         <p:txBody>
-          <a:bodyPr wrap="square" rtlCol="0" anchor="ctr"/>
+          <a:bodyPr rtlCol="0" anchor="ctr" wrap="square"/>
           <a:lstStyle/>
           <a:p>
             <a:pPr algn="l">
@@ -9001,7 +8923,7 @@
           </a:fontRef>
         </p:style>
         <p:txBody>
-          <a:bodyPr wrap="square" rtlCol="0" anchor="ctr"/>
+          <a:bodyPr rtlCol="0" anchor="ctr" wrap="square"/>
           <a:lstStyle/>
           <a:p>
             <a:pPr algn="l">
@@ -9056,7 +8978,7 @@
           </a:fontRef>
         </p:style>
         <p:txBody>
-          <a:bodyPr wrap="square" rtlCol="0" anchor="ctr"/>
+          <a:bodyPr rtlCol="0" anchor="ctr" wrap="square"/>
           <a:lstStyle/>
           <a:p>
             <a:pPr algn="l">
@@ -9111,7 +9033,7 @@
           </a:fontRef>
         </p:style>
         <p:txBody>
-          <a:bodyPr wrap="square" rtlCol="0" anchor="ctr"/>
+          <a:bodyPr rtlCol="0" anchor="ctr" wrap="square"/>
           <a:lstStyle/>
           <a:p>
             <a:pPr algn="l">
@@ -9166,7 +9088,7 @@
           </a:fontRef>
         </p:style>
         <p:txBody>
-          <a:bodyPr wrap="square" rtlCol="0" anchor="ctr"/>
+          <a:bodyPr rtlCol="0" anchor="ctr" wrap="square"/>
           <a:lstStyle/>
           <a:p>
             <a:pPr algn="l">
@@ -9221,7 +9143,7 @@
           </a:fontRef>
         </p:style>
         <p:txBody>
-          <a:bodyPr wrap="square" rtlCol="0" anchor="ctr"/>
+          <a:bodyPr rtlCol="0" anchor="ctr" wrap="square"/>
           <a:lstStyle/>
           <a:p>
             <a:pPr algn="l">
@@ -9276,7 +9198,7 @@
           </a:fontRef>
         </p:style>
         <p:txBody>
-          <a:bodyPr wrap="square" rtlCol="0" anchor="ctr"/>
+          <a:bodyPr rtlCol="0" anchor="ctr" wrap="square"/>
           <a:lstStyle/>
           <a:p>
             <a:pPr algn="l">
@@ -9331,7 +9253,7 @@
           </a:fontRef>
         </p:style>
         <p:txBody>
-          <a:bodyPr wrap="square" rtlCol="0" anchor="ctr"/>
+          <a:bodyPr rtlCol="0" anchor="ctr" wrap="square"/>
           <a:lstStyle/>
           <a:p>
             <a:pPr algn="l">
@@ -9386,7 +9308,7 @@
           </a:fontRef>
         </p:style>
         <p:txBody>
-          <a:bodyPr wrap="square" rtlCol="0" anchor="ctr"/>
+          <a:bodyPr rtlCol="0" anchor="ctr" wrap="square"/>
           <a:lstStyle/>
           <a:p>
             <a:pPr algn="l">
@@ -9441,7 +9363,7 @@
           </a:fontRef>
         </p:style>
         <p:txBody>
-          <a:bodyPr wrap="square" rtlCol="0" anchor="ctr"/>
+          <a:bodyPr rtlCol="0" anchor="ctr" wrap="square"/>
           <a:lstStyle/>
           <a:p>
             <a:pPr algn="l">
@@ -9496,7 +9418,7 @@
           </a:fontRef>
         </p:style>
         <p:txBody>
-          <a:bodyPr wrap="square" rtlCol="0" anchor="ctr"/>
+          <a:bodyPr rtlCol="0" anchor="ctr" wrap="square"/>
           <a:lstStyle/>
           <a:p>
             <a:pPr algn="l">
@@ -9551,7 +9473,7 @@
           </a:fontRef>
         </p:style>
         <p:txBody>
-          <a:bodyPr wrap="square" rtlCol="0" anchor="ctr"/>
+          <a:bodyPr rtlCol="0" anchor="ctr" wrap="square"/>
           <a:lstStyle/>
           <a:p>
             <a:pPr algn="l">
@@ -9606,7 +9528,7 @@
           </a:fontRef>
         </p:style>
         <p:txBody>
-          <a:bodyPr wrap="square" rtlCol="0" anchor="ctr"/>
+          <a:bodyPr rtlCol="0" anchor="ctr" wrap="square"/>
           <a:lstStyle/>
           <a:p>
             <a:pPr algn="l">
@@ -9661,7 +9583,7 @@
           </a:fontRef>
         </p:style>
         <p:txBody>
-          <a:bodyPr wrap="square" rtlCol="0" anchor="ctr"/>
+          <a:bodyPr rtlCol="0" anchor="ctr" wrap="square"/>
           <a:lstStyle/>
           <a:p>
             <a:pPr algn="l">
@@ -9716,7 +9638,7 @@
           </a:fontRef>
         </p:style>
         <p:txBody>
-          <a:bodyPr wrap="square" rtlCol="0" anchor="ctr"/>
+          <a:bodyPr rtlCol="0" anchor="ctr" wrap="square"/>
           <a:lstStyle/>
           <a:p>
             <a:pPr algn="l">
@@ -9771,7 +9693,7 @@
           </a:fontRef>
         </p:style>
         <p:txBody>
-          <a:bodyPr wrap="square" rtlCol="0" anchor="ctr"/>
+          <a:bodyPr rtlCol="0" anchor="ctr" wrap="square"/>
           <a:lstStyle/>
           <a:p>
             <a:pPr algn="l">
@@ -9826,7 +9748,7 @@
           </a:fontRef>
         </p:style>
         <p:txBody>
-          <a:bodyPr wrap="square" rtlCol="0" anchor="ctr"/>
+          <a:bodyPr rtlCol="0" anchor="ctr" wrap="square"/>
           <a:lstStyle/>
           <a:p>
             <a:pPr algn="l">
@@ -9881,7 +9803,7 @@
           </a:fontRef>
         </p:style>
         <p:txBody>
-          <a:bodyPr wrap="square" rtlCol="0" anchor="ctr"/>
+          <a:bodyPr rtlCol="0" anchor="ctr" wrap="square"/>
           <a:lstStyle/>
           <a:p>
             <a:pPr algn="l">
@@ -9936,7 +9858,7 @@
           </a:fontRef>
         </p:style>
         <p:txBody>
-          <a:bodyPr wrap="square" rtlCol="0" anchor="ctr"/>
+          <a:bodyPr rtlCol="0" anchor="ctr" wrap="square"/>
           <a:lstStyle/>
           <a:p>
             <a:pPr algn="l">
@@ -9991,7 +9913,7 @@
           </a:fontRef>
         </p:style>
         <p:txBody>
-          <a:bodyPr wrap="square" rtlCol="0" anchor="ctr"/>
+          <a:bodyPr rtlCol="0" anchor="ctr" wrap="square"/>
           <a:lstStyle/>
           <a:p>
             <a:pPr algn="l">
@@ -10046,7 +9968,7 @@
           </a:fontRef>
         </p:style>
         <p:txBody>
-          <a:bodyPr wrap="square" rtlCol="0" anchor="ctr"/>
+          <a:bodyPr rtlCol="0" anchor="ctr" wrap="square"/>
           <a:lstStyle/>
           <a:p>
             <a:pPr algn="l">
@@ -10101,7 +10023,7 @@
           </a:fontRef>
         </p:style>
         <p:txBody>
-          <a:bodyPr wrap="square" rtlCol="0" anchor="ctr"/>
+          <a:bodyPr rtlCol="0" anchor="ctr" wrap="square"/>
           <a:lstStyle/>
           <a:p>
             <a:pPr algn="l">
@@ -10156,7 +10078,7 @@
           </a:fontRef>
         </p:style>
         <p:txBody>
-          <a:bodyPr wrap="square" rtlCol="0" anchor="ctr"/>
+          <a:bodyPr rtlCol="0" anchor="ctr" wrap="square"/>
           <a:lstStyle/>
           <a:p>
             <a:pPr algn="l">
@@ -10211,7 +10133,7 @@
           </a:fontRef>
         </p:style>
         <p:txBody>
-          <a:bodyPr wrap="square" rtlCol="0" anchor="ctr"/>
+          <a:bodyPr rtlCol="0" anchor="ctr" wrap="square"/>
           <a:lstStyle/>
           <a:p>
             <a:pPr algn="l">
@@ -10266,7 +10188,7 @@
           </a:fontRef>
         </p:style>
         <p:txBody>
-          <a:bodyPr wrap="square" rtlCol="0" anchor="ctr"/>
+          <a:bodyPr rtlCol="0" anchor="ctr" wrap="square"/>
           <a:lstStyle/>
           <a:p>
             <a:pPr algn="l">
@@ -10292,7 +10214,7 @@
 </file>
 
 <file path=ppt/slides/slide17.xml><?xml version="1.0" encoding="utf-8"?>
-<p:sld xmlns:a="http://schemas.openxmlformats.org/drawingml/2006/main" xmlns:r="http://schemas.openxmlformats.org/officeDocument/2006/relationships" xmlns:p="http://schemas.openxmlformats.org/presentationml/2006/main">
+<p:sld xmlns:a="http://schemas.openxmlformats.org/drawingml/2006/main" xmlns:p="http://schemas.openxmlformats.org/presentationml/2006/main" xmlns:r="http://schemas.openxmlformats.org/officeDocument/2006/relationships">
   <p:cSld>
     <p:bg>
       <p:bgPr>
@@ -10308,14 +10230,7 @@
         <p:cNvGrpSpPr/>
         <p:nvPr/>
       </p:nvGrpSpPr>
-      <p:grpSpPr>
-        <a:xfrm>
-          <a:off x="0" y="0"/>
-          <a:ext cx="0" cy="0"/>
-          <a:chOff x="0" y="0"/>
-          <a:chExt cx="0" cy="0"/>
-        </a:xfrm>
-      </p:grpSpPr>
+      <p:grpSpPr/>
       <p:sp>
         <p:nvSpPr>
           <p:cNvPr id="2" name="TextBox 1"/>
@@ -10392,7 +10307,6 @@
           <a:lstStyle/>
           <a:p>
             <a:pPr algn="ctr"/>
-            <a:endParaRPr/>
           </a:p>
         </p:txBody>
       </p:sp>
@@ -10438,7 +10352,6 @@
           <a:lstStyle/>
           <a:p>
             <a:pPr algn="ctr"/>
-            <a:endParaRPr/>
           </a:p>
         </p:txBody>
       </p:sp>
@@ -10507,7 +10420,6 @@
                 <a:latin typeface="Calibri"/>
               </a:defRPr>
             </a:pPr>
-            <a:endParaRPr/>
           </a:p>
           <a:p>
             <a:pPr>
@@ -10553,7 +10465,6 @@
                 <a:latin typeface="Calibri"/>
               </a:defRPr>
             </a:pPr>
-            <a:endParaRPr/>
           </a:p>
           <a:p>
             <a:pPr>
@@ -10599,7 +10510,6 @@
                 <a:latin typeface="Calibri"/>
               </a:defRPr>
             </a:pPr>
-            <a:endParaRPr/>
           </a:p>
           <a:p>
             <a:pPr>
@@ -10629,7 +10539,6 @@
                 <a:latin typeface="Calibri"/>
               </a:defRPr>
             </a:pPr>
-            <a:endParaRPr/>
           </a:p>
           <a:p>
             <a:pPr>
@@ -10691,7 +10600,6 @@
           <a:lstStyle/>
           <a:p>
             <a:pPr algn="ctr"/>
-            <a:endParaRPr/>
           </a:p>
         </p:txBody>
       </p:sp>
@@ -10744,7 +10652,6 @@
                 <a:latin typeface="Calibri"/>
               </a:defRPr>
             </a:pPr>
-            <a:endParaRPr/>
           </a:p>
           <a:p>
             <a:pPr>
@@ -10790,7 +10697,6 @@
                 <a:latin typeface="Calibri"/>
               </a:defRPr>
             </a:pPr>
-            <a:endParaRPr/>
           </a:p>
           <a:p>
             <a:pPr>
@@ -10836,7 +10742,6 @@
                 <a:latin typeface="Calibri"/>
               </a:defRPr>
             </a:pPr>
-            <a:endParaRPr/>
           </a:p>
           <a:p>
             <a:pPr>
@@ -10882,7 +10787,6 @@
                 <a:latin typeface="Calibri"/>
               </a:defRPr>
             </a:pPr>
-            <a:endParaRPr/>
           </a:p>
           <a:p>
             <a:pPr>
@@ -10911,7 +10815,7 @@
 </file>
 
 <file path=ppt/slides/slide18.xml><?xml version="1.0" encoding="utf-8"?>
-<p:sld xmlns:a="http://schemas.openxmlformats.org/drawingml/2006/main" xmlns:r="http://schemas.openxmlformats.org/officeDocument/2006/relationships" xmlns:p="http://schemas.openxmlformats.org/presentationml/2006/main">
+<p:sld xmlns:a="http://schemas.openxmlformats.org/drawingml/2006/main" xmlns:p="http://schemas.openxmlformats.org/presentationml/2006/main" xmlns:r="http://schemas.openxmlformats.org/officeDocument/2006/relationships">
   <p:cSld>
     <p:bg>
       <p:bgPr>
@@ -10927,14 +10831,7 @@
         <p:cNvGrpSpPr/>
         <p:nvPr/>
       </p:nvGrpSpPr>
-      <p:grpSpPr>
-        <a:xfrm>
-          <a:off x="0" y="0"/>
-          <a:ext cx="0" cy="0"/>
-          <a:chOff x="0" y="0"/>
-          <a:chExt cx="0" cy="0"/>
-        </a:xfrm>
-      </p:grpSpPr>
+      <p:grpSpPr/>
       <p:sp>
         <p:nvSpPr>
           <p:cNvPr id="2" name="TextBox 1"/>
@@ -11011,7 +10908,6 @@
           <a:lstStyle/>
           <a:p>
             <a:pPr algn="ctr"/>
-            <a:endParaRPr/>
           </a:p>
         </p:txBody>
       </p:sp>
@@ -11302,7 +11198,7 @@
 </file>
 
 <file path=ppt/slides/slide19.xml><?xml version="1.0" encoding="utf-8"?>
-<p:sld xmlns:a="http://schemas.openxmlformats.org/drawingml/2006/main" xmlns:r="http://schemas.openxmlformats.org/officeDocument/2006/relationships" xmlns:p="http://schemas.openxmlformats.org/presentationml/2006/main">
+<p:sld xmlns:a="http://schemas.openxmlformats.org/drawingml/2006/main" xmlns:p="http://schemas.openxmlformats.org/presentationml/2006/main" xmlns:r="http://schemas.openxmlformats.org/officeDocument/2006/relationships">
   <p:cSld>
     <p:bg>
       <p:bgPr>
@@ -11318,14 +11214,7 @@
         <p:cNvGrpSpPr/>
         <p:nvPr/>
       </p:nvGrpSpPr>
-      <p:grpSpPr>
-        <a:xfrm>
-          <a:off x="0" y="0"/>
-          <a:ext cx="0" cy="0"/>
-          <a:chOff x="0" y="0"/>
-          <a:chExt cx="0" cy="0"/>
-        </a:xfrm>
-      </p:grpSpPr>
+      <p:grpSpPr/>
       <p:sp>
         <p:nvSpPr>
           <p:cNvPr id="2" name="TextBox 1"/>
@@ -11443,7 +11332,7 @@
 </file>
 
 <file path=ppt/slides/slide2.xml><?xml version="1.0" encoding="utf-8"?>
-<p:sld xmlns:a="http://schemas.openxmlformats.org/drawingml/2006/main" xmlns:r="http://schemas.openxmlformats.org/officeDocument/2006/relationships" xmlns:p="http://schemas.openxmlformats.org/presentationml/2006/main">
+<p:sld xmlns:a="http://schemas.openxmlformats.org/drawingml/2006/main" xmlns:p="http://schemas.openxmlformats.org/presentationml/2006/main" xmlns:r="http://schemas.openxmlformats.org/officeDocument/2006/relationships">
   <p:cSld>
     <p:bg>
       <p:bgPr>
@@ -11459,14 +11348,7 @@
         <p:cNvGrpSpPr/>
         <p:nvPr/>
       </p:nvGrpSpPr>
-      <p:grpSpPr>
-        <a:xfrm>
-          <a:off x="0" y="0"/>
-          <a:ext cx="0" cy="0"/>
-          <a:chOff x="0" y="0"/>
-          <a:chExt cx="0" cy="0"/>
-        </a:xfrm>
-      </p:grpSpPr>
+      <p:grpSpPr/>
       <p:sp>
         <p:nvSpPr>
           <p:cNvPr id="2" name="TextBox 1"/>
@@ -11543,7 +11425,6 @@
           <a:lstStyle/>
           <a:p>
             <a:pPr algn="ctr"/>
-            <a:endParaRPr/>
           </a:p>
         </p:txBody>
       </p:sp>
@@ -11803,7 +11684,7 @@
 </file>
 
 <file path=ppt/slides/slide3.xml><?xml version="1.0" encoding="utf-8"?>
-<p:sld xmlns:a="http://schemas.openxmlformats.org/drawingml/2006/main" xmlns:r="http://schemas.openxmlformats.org/officeDocument/2006/relationships" xmlns:p="http://schemas.openxmlformats.org/presentationml/2006/main" show="0">
+<p:sld xmlns:a="http://schemas.openxmlformats.org/drawingml/2006/main" xmlns:p="http://schemas.openxmlformats.org/presentationml/2006/main" xmlns:r="http://schemas.openxmlformats.org/officeDocument/2006/relationships">
   <p:cSld>
     <p:bg>
       <p:bgPr>
@@ -11819,14 +11700,7 @@
         <p:cNvGrpSpPr/>
         <p:nvPr/>
       </p:nvGrpSpPr>
-      <p:grpSpPr>
-        <a:xfrm>
-          <a:off x="0" y="0"/>
-          <a:ext cx="0" cy="0"/>
-          <a:chOff x="0" y="0"/>
-          <a:chExt cx="0" cy="0"/>
-        </a:xfrm>
-      </p:grpSpPr>
+      <p:grpSpPr/>
       <p:sp>
         <p:nvSpPr>
           <p:cNvPr id="2" name="TextBox 1"/>
@@ -11903,7 +11777,6 @@
           <a:lstStyle/>
           <a:p>
             <a:pPr algn="ctr"/>
-            <a:endParaRPr/>
           </a:p>
         </p:txBody>
       </p:sp>
@@ -11949,7 +11822,6 @@
           <a:lstStyle/>
           <a:p>
             <a:pPr algn="ctr"/>
-            <a:endParaRPr/>
           </a:p>
         </p:txBody>
       </p:sp>
@@ -12086,7 +11958,6 @@
                 <a:latin typeface="Calibri"/>
               </a:defRPr>
             </a:pPr>
-            <a:endParaRPr/>
           </a:p>
           <a:p>
             <a:pPr>
@@ -12164,7 +12035,6 @@
                 <a:latin typeface="Calibri"/>
               </a:defRPr>
             </a:pPr>
-            <a:endParaRPr/>
           </a:p>
           <a:p>
             <a:pPr>
@@ -12242,7 +12112,6 @@
           <a:lstStyle/>
           <a:p>
             <a:pPr algn="ctr"/>
-            <a:endParaRPr/>
           </a:p>
         </p:txBody>
       </p:sp>
@@ -12277,7 +12146,7 @@
               </a:defRPr>
             </a:pPr>
             <a:r>
-              <a:t>NEW: Talent Diagnostic Engine</a:t>
+              <a:t>NEW: CDWC Diagnostic Engine</a:t>
             </a:r>
           </a:p>
         </p:txBody>
@@ -12411,7 +12280,6 @@
                 <a:latin typeface="Calibri"/>
               </a:defRPr>
             </a:pPr>
-            <a:endParaRPr/>
           </a:p>
           <a:p>
             <a:pPr>
@@ -12488,7 +12356,7 @@
 </file>
 
 <file path=ppt/slides/slide4.xml><?xml version="1.0" encoding="utf-8"?>
-<p:sld xmlns:a="http://schemas.openxmlformats.org/drawingml/2006/main" xmlns:r="http://schemas.openxmlformats.org/officeDocument/2006/relationships" xmlns:p="http://schemas.openxmlformats.org/presentationml/2006/main">
+<p:sld xmlns:a="http://schemas.openxmlformats.org/drawingml/2006/main" xmlns:p="http://schemas.openxmlformats.org/presentationml/2006/main" xmlns:r="http://schemas.openxmlformats.org/officeDocument/2006/relationships">
   <p:cSld>
     <p:bg>
       <p:bgPr>
@@ -12504,14 +12372,7 @@
         <p:cNvGrpSpPr/>
         <p:nvPr/>
       </p:nvGrpSpPr>
-      <p:grpSpPr>
-        <a:xfrm>
-          <a:off x="0" y="0"/>
-          <a:ext cx="0" cy="0"/>
-          <a:chOff x="0" y="0"/>
-          <a:chExt cx="0" cy="0"/>
-        </a:xfrm>
-      </p:grpSpPr>
+      <p:grpSpPr/>
       <p:sp>
         <p:nvSpPr>
           <p:cNvPr id="2" name="TextBox 1"/>
@@ -12624,7 +12485,6 @@
           <a:lstStyle/>
           <a:p>
             <a:pPr algn="ctr"/>
-            <a:endParaRPr/>
           </a:p>
         </p:txBody>
       </p:sp>
@@ -12670,7 +12530,6 @@
           <a:lstStyle/>
           <a:p>
             <a:pPr algn="ctr"/>
-            <a:endParaRPr/>
           </a:p>
         </p:txBody>
       </p:sp>
@@ -12855,7 +12714,6 @@
           <a:lstStyle/>
           <a:p>
             <a:pPr algn="ctr"/>
-            <a:endParaRPr/>
           </a:p>
         </p:txBody>
       </p:sp>
@@ -13072,7 +12930,6 @@
           <a:lstStyle/>
           <a:p>
             <a:pPr algn="ctr"/>
-            <a:endParaRPr/>
           </a:p>
         </p:txBody>
       </p:sp>
@@ -13337,7 +13194,6 @@
           <a:lstStyle/>
           <a:p>
             <a:pPr algn="ctr"/>
-            <a:endParaRPr/>
           </a:p>
         </p:txBody>
       </p:sp>
@@ -13505,7 +13361,7 @@
 </file>
 
 <file path=ppt/slides/slide5.xml><?xml version="1.0" encoding="utf-8"?>
-<p:sld xmlns:a="http://schemas.openxmlformats.org/drawingml/2006/main" xmlns:r="http://schemas.openxmlformats.org/officeDocument/2006/relationships" xmlns:p="http://schemas.openxmlformats.org/presentationml/2006/main">
+<p:sld xmlns:a="http://schemas.openxmlformats.org/drawingml/2006/main" xmlns:p="http://schemas.openxmlformats.org/presentationml/2006/main" xmlns:r="http://schemas.openxmlformats.org/officeDocument/2006/relationships">
   <p:cSld>
     <p:bg>
       <p:bgPr>
@@ -13521,14 +13377,7 @@
         <p:cNvGrpSpPr/>
         <p:nvPr/>
       </p:nvGrpSpPr>
-      <p:grpSpPr>
-        <a:xfrm>
-          <a:off x="0" y="0"/>
-          <a:ext cx="0" cy="0"/>
-          <a:chOff x="0" y="0"/>
-          <a:chExt cx="0" cy="0"/>
-        </a:xfrm>
-      </p:grpSpPr>
+      <p:grpSpPr/>
       <p:sp>
         <p:nvSpPr>
           <p:cNvPr id="2" name="TextBox 1"/>
@@ -13574,7 +13423,7 @@
         <p:spPr>
           <a:xfrm>
             <a:off x="548640" y="914400"/>
-            <a:ext cx="10972800" cy="307777"/>
+            <a:ext cx="10972800" cy="365760"/>
           </a:xfrm>
           <a:prstGeom prst="rect">
             <a:avLst/>
@@ -13596,18 +13445,8 @@
               </a:defRPr>
             </a:pPr>
             <a:r>
-              <a:rPr lang="en-GB" dirty="0"/>
-              <a:t>SMA_</a:t>
-            </a:r>
-            <a:r>
-              <a:rPr dirty="0"/>
-              <a:t>HRIS and TPCP joined on </a:t>
-            </a:r>
-            <a:r>
-              <a:rPr dirty="0" err="1"/>
-              <a:t>dummy_id</a:t>
-            </a:r>
-            <a:endParaRPr dirty="0"/>
+              <a:t>HRIS and TPCP joined on dummy_id</a:t>
+            </a:r>
           </a:p>
         </p:txBody>
       </p:sp>
@@ -13651,7 +13490,6 @@
           <a:lstStyle/>
           <a:p>
             <a:pPr algn="ctr"/>
-            <a:endParaRPr/>
           </a:p>
         </p:txBody>
       </p:sp>
@@ -13697,7 +13535,6 @@
           <a:lstStyle/>
           <a:p>
             <a:pPr algn="ctr"/>
-            <a:endParaRPr/>
           </a:p>
         </p:txBody>
       </p:sp>
@@ -13930,7 +13767,6 @@
           <a:lstStyle/>
           <a:p>
             <a:pPr algn="ctr"/>
-            <a:endParaRPr/>
           </a:p>
         </p:txBody>
       </p:sp>
@@ -14163,7 +13999,6 @@
           <a:lstStyle/>
           <a:p>
             <a:pPr algn="ctr"/>
-            <a:endParaRPr/>
           </a:p>
         </p:txBody>
       </p:sp>
@@ -14283,7 +14118,7 @@
 </file>
 
 <file path=ppt/slides/slide6.xml><?xml version="1.0" encoding="utf-8"?>
-<p:sld xmlns:a="http://schemas.openxmlformats.org/drawingml/2006/main" xmlns:r="http://schemas.openxmlformats.org/officeDocument/2006/relationships" xmlns:p="http://schemas.openxmlformats.org/presentationml/2006/main" show="0">
+<p:sld xmlns:a="http://schemas.openxmlformats.org/drawingml/2006/main" xmlns:p="http://schemas.openxmlformats.org/presentationml/2006/main" xmlns:r="http://schemas.openxmlformats.org/officeDocument/2006/relationships">
   <p:cSld>
     <p:bg>
       <p:bgPr>
@@ -14299,14 +14134,7 @@
         <p:cNvGrpSpPr/>
         <p:nvPr/>
       </p:nvGrpSpPr>
-      <p:grpSpPr>
-        <a:xfrm>
-          <a:off x="0" y="0"/>
-          <a:ext cx="0" cy="0"/>
-          <a:chOff x="0" y="0"/>
-          <a:chExt cx="0" cy="0"/>
-        </a:xfrm>
-      </p:grpSpPr>
+      <p:grpSpPr/>
       <p:sp>
         <p:nvSpPr>
           <p:cNvPr id="2" name="TextBox 1"/>
@@ -14383,7 +14211,6 @@
           <a:lstStyle/>
           <a:p>
             <a:pPr algn="ctr"/>
-            <a:endParaRPr/>
           </a:p>
         </p:txBody>
       </p:sp>
@@ -14584,7 +14411,7 @@
           </a:fontRef>
         </p:style>
         <p:txBody>
-          <a:bodyPr wrap="square" rtlCol="0" anchor="ctr"/>
+          <a:bodyPr rtlCol="0" anchor="ctr" wrap="square"/>
           <a:lstStyle/>
           <a:p>
             <a:pPr algn="l">
@@ -14639,7 +14466,7 @@
           </a:fontRef>
         </p:style>
         <p:txBody>
-          <a:bodyPr wrap="square" rtlCol="0" anchor="ctr"/>
+          <a:bodyPr rtlCol="0" anchor="ctr" wrap="square"/>
           <a:lstStyle/>
           <a:p>
             <a:pPr algn="l">
@@ -14694,7 +14521,7 @@
           </a:fontRef>
         </p:style>
         <p:txBody>
-          <a:bodyPr wrap="square" rtlCol="0" anchor="ctr"/>
+          <a:bodyPr rtlCol="0" anchor="ctr" wrap="square"/>
           <a:lstStyle/>
           <a:p>
             <a:pPr algn="l">
@@ -14749,7 +14576,7 @@
           </a:fontRef>
         </p:style>
         <p:txBody>
-          <a:bodyPr wrap="square" rtlCol="0" anchor="ctr"/>
+          <a:bodyPr rtlCol="0" anchor="ctr" wrap="square"/>
           <a:lstStyle/>
           <a:p>
             <a:pPr algn="l">
@@ -14804,7 +14631,7 @@
           </a:fontRef>
         </p:style>
         <p:txBody>
-          <a:bodyPr wrap="square" rtlCol="0" anchor="ctr"/>
+          <a:bodyPr rtlCol="0" anchor="ctr" wrap="square"/>
           <a:lstStyle/>
           <a:p>
             <a:pPr algn="l">
@@ -14859,7 +14686,7 @@
           </a:fontRef>
         </p:style>
         <p:txBody>
-          <a:bodyPr wrap="square" rtlCol="0" anchor="ctr"/>
+          <a:bodyPr rtlCol="0" anchor="ctr" wrap="square"/>
           <a:lstStyle/>
           <a:p>
             <a:pPr algn="l">
@@ -14914,7 +14741,7 @@
           </a:fontRef>
         </p:style>
         <p:txBody>
-          <a:bodyPr wrap="square" rtlCol="0" anchor="ctr"/>
+          <a:bodyPr rtlCol="0" anchor="ctr" wrap="square"/>
           <a:lstStyle/>
           <a:p>
             <a:pPr algn="l">
@@ -14969,7 +14796,7 @@
           </a:fontRef>
         </p:style>
         <p:txBody>
-          <a:bodyPr wrap="square" rtlCol="0" anchor="ctr"/>
+          <a:bodyPr rtlCol="0" anchor="ctr" wrap="square"/>
           <a:lstStyle/>
           <a:p>
             <a:pPr algn="l">
@@ -15024,7 +14851,7 @@
           </a:fontRef>
         </p:style>
         <p:txBody>
-          <a:bodyPr wrap="square" rtlCol="0" anchor="ctr"/>
+          <a:bodyPr rtlCol="0" anchor="ctr" wrap="square"/>
           <a:lstStyle/>
           <a:p>
             <a:pPr algn="l">
@@ -15079,7 +14906,7 @@
           </a:fontRef>
         </p:style>
         <p:txBody>
-          <a:bodyPr wrap="square" rtlCol="0" anchor="ctr"/>
+          <a:bodyPr rtlCol="0" anchor="ctr" wrap="square"/>
           <a:lstStyle/>
           <a:p>
             <a:pPr algn="l">
@@ -15134,7 +14961,7 @@
           </a:fontRef>
         </p:style>
         <p:txBody>
-          <a:bodyPr wrap="square" rtlCol="0" anchor="ctr"/>
+          <a:bodyPr rtlCol="0" anchor="ctr" wrap="square"/>
           <a:lstStyle/>
           <a:p>
             <a:pPr algn="l">
@@ -15189,7 +15016,7 @@
           </a:fontRef>
         </p:style>
         <p:txBody>
-          <a:bodyPr wrap="square" rtlCol="0" anchor="ctr"/>
+          <a:bodyPr rtlCol="0" anchor="ctr" wrap="square"/>
           <a:lstStyle/>
           <a:p>
             <a:pPr algn="l">
@@ -15248,7 +15075,6 @@
           <a:lstStyle/>
           <a:p>
             <a:pPr algn="ctr"/>
-            <a:endParaRPr/>
           </a:p>
         </p:txBody>
       </p:sp>
@@ -15297,7 +15123,7 @@
 </file>
 
 <file path=ppt/slides/slide7.xml><?xml version="1.0" encoding="utf-8"?>
-<p:sld xmlns:a="http://schemas.openxmlformats.org/drawingml/2006/main" xmlns:r="http://schemas.openxmlformats.org/officeDocument/2006/relationships" xmlns:p="http://schemas.openxmlformats.org/presentationml/2006/main">
+<p:sld xmlns:a="http://schemas.openxmlformats.org/drawingml/2006/main" xmlns:p="http://schemas.openxmlformats.org/presentationml/2006/main" xmlns:r="http://schemas.openxmlformats.org/officeDocument/2006/relationships">
   <p:cSld>
     <p:bg>
       <p:bgPr>
@@ -15313,14 +15139,7 @@
         <p:cNvGrpSpPr/>
         <p:nvPr/>
       </p:nvGrpSpPr>
-      <p:grpSpPr>
-        <a:xfrm>
-          <a:off x="0" y="0"/>
-          <a:ext cx="0" cy="0"/>
-          <a:chOff x="0" y="0"/>
-          <a:chExt cx="0" cy="0"/>
-        </a:xfrm>
-      </p:grpSpPr>
+      <p:grpSpPr/>
       <p:sp>
         <p:nvSpPr>
           <p:cNvPr id="2" name="TextBox 1"/>
@@ -15397,7 +15216,6 @@
           <a:lstStyle/>
           <a:p>
             <a:pPr algn="ctr"/>
-            <a:endParaRPr/>
           </a:p>
         </p:txBody>
       </p:sp>
@@ -15598,7 +15416,7 @@
           </a:fontRef>
         </p:style>
         <p:txBody>
-          <a:bodyPr wrap="square" rtlCol="0" anchor="ctr"/>
+          <a:bodyPr rtlCol="0" anchor="ctr" wrap="square"/>
           <a:lstStyle/>
           <a:p>
             <a:pPr algn="l">
@@ -15653,7 +15471,7 @@
           </a:fontRef>
         </p:style>
         <p:txBody>
-          <a:bodyPr wrap="square" rtlCol="0" anchor="ctr"/>
+          <a:bodyPr rtlCol="0" anchor="ctr" wrap="square"/>
           <a:lstStyle/>
           <a:p>
             <a:pPr algn="l">
@@ -15712,7 +15530,7 @@
           </a:fontRef>
         </p:style>
         <p:txBody>
-          <a:bodyPr wrap="square" rtlCol="0" anchor="ctr"/>
+          <a:bodyPr rtlCol="0" anchor="ctr" wrap="square"/>
           <a:lstStyle/>
           <a:p>
             <a:pPr algn="l">
@@ -15771,7 +15589,7 @@
           </a:fontRef>
         </p:style>
         <p:txBody>
-          <a:bodyPr wrap="square" rtlCol="0" anchor="ctr"/>
+          <a:bodyPr rtlCol="0" anchor="ctr" wrap="square"/>
           <a:lstStyle/>
           <a:p>
             <a:pPr algn="l">
@@ -15826,7 +15644,7 @@
           </a:fontRef>
         </p:style>
         <p:txBody>
-          <a:bodyPr wrap="square" rtlCol="0" anchor="ctr"/>
+          <a:bodyPr rtlCol="0" anchor="ctr" wrap="square"/>
           <a:lstStyle/>
           <a:p>
             <a:pPr algn="l">
@@ -15885,7 +15703,7 @@
           </a:fontRef>
         </p:style>
         <p:txBody>
-          <a:bodyPr wrap="square" rtlCol="0" anchor="ctr"/>
+          <a:bodyPr rtlCol="0" anchor="ctr" wrap="square"/>
           <a:lstStyle/>
           <a:p>
             <a:pPr algn="l">
@@ -15944,7 +15762,7 @@
           </a:fontRef>
         </p:style>
         <p:txBody>
-          <a:bodyPr wrap="square" rtlCol="0" anchor="ctr"/>
+          <a:bodyPr rtlCol="0" anchor="ctr" wrap="square"/>
           <a:lstStyle/>
           <a:p>
             <a:pPr algn="l">
@@ -15999,7 +15817,7 @@
           </a:fontRef>
         </p:style>
         <p:txBody>
-          <a:bodyPr wrap="square" rtlCol="0" anchor="ctr"/>
+          <a:bodyPr rtlCol="0" anchor="ctr" wrap="square"/>
           <a:lstStyle/>
           <a:p>
             <a:pPr algn="l">
@@ -16058,7 +15876,7 @@
           </a:fontRef>
         </p:style>
         <p:txBody>
-          <a:bodyPr wrap="square" rtlCol="0" anchor="ctr"/>
+          <a:bodyPr rtlCol="0" anchor="ctr" wrap="square"/>
           <a:lstStyle/>
           <a:p>
             <a:pPr algn="l">
@@ -16113,7 +15931,7 @@
           </a:fontRef>
         </p:style>
         <p:txBody>
-          <a:bodyPr wrap="square" rtlCol="0" anchor="ctr"/>
+          <a:bodyPr rtlCol="0" anchor="ctr" wrap="square"/>
           <a:lstStyle/>
           <a:p>
             <a:pPr algn="l">
@@ -16168,7 +15986,7 @@
           </a:fontRef>
         </p:style>
         <p:txBody>
-          <a:bodyPr wrap="square" rtlCol="0" anchor="ctr"/>
+          <a:bodyPr rtlCol="0" anchor="ctr" wrap="square"/>
           <a:lstStyle/>
           <a:p>
             <a:pPr algn="l">
@@ -16227,7 +16045,7 @@
           </a:fontRef>
         </p:style>
         <p:txBody>
-          <a:bodyPr wrap="square" rtlCol="0" anchor="ctr"/>
+          <a:bodyPr rtlCol="0" anchor="ctr" wrap="square"/>
           <a:lstStyle/>
           <a:p>
             <a:pPr algn="l">
@@ -16282,7 +16100,7 @@
           </a:fontRef>
         </p:style>
         <p:txBody>
-          <a:bodyPr wrap="square" rtlCol="0" anchor="ctr"/>
+          <a:bodyPr rtlCol="0" anchor="ctr" wrap="square"/>
           <a:lstStyle/>
           <a:p>
             <a:pPr algn="l">
@@ -16337,7 +16155,7 @@
           </a:fontRef>
         </p:style>
         <p:txBody>
-          <a:bodyPr wrap="square" rtlCol="0" anchor="ctr"/>
+          <a:bodyPr rtlCol="0" anchor="ctr" wrap="square"/>
           <a:lstStyle/>
           <a:p>
             <a:pPr algn="l">
@@ -16396,7 +16214,7 @@
           </a:fontRef>
         </p:style>
         <p:txBody>
-          <a:bodyPr wrap="square" rtlCol="0" anchor="ctr"/>
+          <a:bodyPr rtlCol="0" anchor="ctr" wrap="square"/>
           <a:lstStyle/>
           <a:p>
             <a:pPr algn="l">
@@ -16451,7 +16269,7 @@
           </a:fontRef>
         </p:style>
         <p:txBody>
-          <a:bodyPr wrap="square" rtlCol="0" anchor="ctr"/>
+          <a:bodyPr rtlCol="0" anchor="ctr" wrap="square"/>
           <a:lstStyle/>
           <a:p>
             <a:pPr algn="l">
@@ -16506,7 +16324,7 @@
           </a:fontRef>
         </p:style>
         <p:txBody>
-          <a:bodyPr wrap="square" rtlCol="0" anchor="ctr"/>
+          <a:bodyPr rtlCol="0" anchor="ctr" wrap="square"/>
           <a:lstStyle/>
           <a:p>
             <a:pPr algn="l">
@@ -16565,7 +16383,7 @@
           </a:fontRef>
         </p:style>
         <p:txBody>
-          <a:bodyPr wrap="square" rtlCol="0" anchor="ctr"/>
+          <a:bodyPr rtlCol="0" anchor="ctr" wrap="square"/>
           <a:lstStyle/>
           <a:p>
             <a:pPr algn="l">
@@ -16591,7 +16409,7 @@
 </file>
 
 <file path=ppt/slides/slide8.xml><?xml version="1.0" encoding="utf-8"?>
-<p:sld xmlns:a="http://schemas.openxmlformats.org/drawingml/2006/main" xmlns:r="http://schemas.openxmlformats.org/officeDocument/2006/relationships" xmlns:p="http://schemas.openxmlformats.org/presentationml/2006/main">
+<p:sld xmlns:a="http://schemas.openxmlformats.org/drawingml/2006/main" xmlns:p="http://schemas.openxmlformats.org/presentationml/2006/main" xmlns:r="http://schemas.openxmlformats.org/officeDocument/2006/relationships">
   <p:cSld>
     <p:bg>
       <p:bgPr>
@@ -16607,14 +16425,7 @@
         <p:cNvGrpSpPr/>
         <p:nvPr/>
       </p:nvGrpSpPr>
-      <p:grpSpPr>
-        <a:xfrm>
-          <a:off x="0" y="0"/>
-          <a:ext cx="0" cy="0"/>
-          <a:chOff x="0" y="0"/>
-          <a:chExt cx="0" cy="0"/>
-        </a:xfrm>
-      </p:grpSpPr>
+      <p:grpSpPr/>
       <p:sp>
         <p:nvSpPr>
           <p:cNvPr id="2" name="TextBox 1"/>
@@ -16727,7 +16538,6 @@
           <a:lstStyle/>
           <a:p>
             <a:pPr algn="ctr"/>
-            <a:endParaRPr/>
           </a:p>
         </p:txBody>
       </p:sp>
@@ -16773,7 +16583,6 @@
           <a:lstStyle/>
           <a:p>
             <a:pPr algn="ctr"/>
-            <a:endParaRPr/>
           </a:p>
         </p:txBody>
       </p:sp>
@@ -16855,7 +16664,6 @@
           <a:lstStyle/>
           <a:p>
             <a:pPr algn="ctr"/>
-            <a:endParaRPr/>
           </a:p>
         </p:txBody>
       </p:sp>
@@ -17131,7 +16939,6 @@
           <a:lstStyle/>
           <a:p>
             <a:pPr algn="ctr"/>
-            <a:endParaRPr/>
           </a:p>
         </p:txBody>
       </p:sp>
@@ -17236,7 +17043,6 @@
                 <a:latin typeface="Calibri"/>
               </a:defRPr>
             </a:pPr>
-            <a:endParaRPr/>
           </a:p>
           <a:p>
             <a:pPr>
@@ -17282,7 +17088,6 @@
                 <a:latin typeface="Calibri"/>
               </a:defRPr>
             </a:pPr>
-            <a:endParaRPr/>
           </a:p>
           <a:p>
             <a:pPr>
@@ -17312,7 +17117,6 @@
                 <a:latin typeface="Calibri"/>
               </a:defRPr>
             </a:pPr>
-            <a:endParaRPr/>
           </a:p>
           <a:p>
             <a:pPr>
@@ -17358,7 +17162,6 @@
                 <a:latin typeface="Calibri"/>
               </a:defRPr>
             </a:pPr>
-            <a:endParaRPr/>
           </a:p>
           <a:p>
             <a:pPr>
@@ -17403,7 +17206,7 @@
 </file>
 
 <file path=ppt/slides/slide9.xml><?xml version="1.0" encoding="utf-8"?>
-<p:sld xmlns:a="http://schemas.openxmlformats.org/drawingml/2006/main" xmlns:r="http://schemas.openxmlformats.org/officeDocument/2006/relationships" xmlns:p="http://schemas.openxmlformats.org/presentationml/2006/main">
+<p:sld xmlns:a="http://schemas.openxmlformats.org/drawingml/2006/main" xmlns:p="http://schemas.openxmlformats.org/presentationml/2006/main" xmlns:r="http://schemas.openxmlformats.org/officeDocument/2006/relationships">
   <p:cSld>
     <p:bg>
       <p:bgPr>
@@ -17419,14 +17222,7 @@
         <p:cNvGrpSpPr/>
         <p:nvPr/>
       </p:nvGrpSpPr>
-      <p:grpSpPr>
-        <a:xfrm>
-          <a:off x="0" y="0"/>
-          <a:ext cx="0" cy="0"/>
-          <a:chOff x="0" y="0"/>
-          <a:chExt cx="0" cy="0"/>
-        </a:xfrm>
-      </p:grpSpPr>
+      <p:grpSpPr/>
       <p:sp>
         <p:nvSpPr>
           <p:cNvPr id="2" name="TextBox 1"/>
@@ -17503,7 +17299,6 @@
           <a:lstStyle/>
           <a:p>
             <a:pPr algn="ctr"/>
-            <a:endParaRPr/>
           </a:p>
         </p:txBody>
       </p:sp>
@@ -17549,7 +17344,6 @@
           <a:lstStyle/>
           <a:p>
             <a:pPr algn="ctr"/>
-            <a:endParaRPr/>
           </a:p>
         </p:txBody>
       </p:sp>
@@ -17671,7 +17465,6 @@
           <a:lstStyle/>
           <a:p>
             <a:pPr algn="ctr"/>
-            <a:endParaRPr/>
           </a:p>
         </p:txBody>
       </p:sp>
@@ -17797,7 +17590,6 @@
           <a:lstStyle/>
           <a:p>
             <a:pPr algn="ctr"/>
-            <a:endParaRPr/>
           </a:p>
         </p:txBody>
       </p:sp>
@@ -17923,7 +17715,6 @@
           <a:lstStyle/>
           <a:p>
             <a:pPr algn="ctr"/>
-            <a:endParaRPr/>
           </a:p>
         </p:txBody>
       </p:sp>
@@ -18013,7 +17804,6 @@
           <a:lstStyle/>
           <a:p>
             <a:pPr algn="ctr"/>
-            <a:endParaRPr/>
           </a:p>
         </p:txBody>
       </p:sp>
@@ -18103,7 +17893,6 @@
           <a:lstStyle/>
           <a:p>
             <a:pPr algn="ctr"/>
-            <a:endParaRPr/>
           </a:p>
         </p:txBody>
       </p:sp>
@@ -18229,7 +18018,6 @@
           <a:lstStyle/>
           <a:p>
             <a:pPr algn="ctr"/>
-            <a:endParaRPr/>
           </a:p>
         </p:txBody>
       </p:sp>
@@ -18349,7 +18137,6 @@
           <a:lstStyle/>
           <a:p>
             <a:pPr algn="ctr"/>
-            <a:endParaRPr/>
           </a:p>
         </p:txBody>
       </p:sp>
